--- a/presentations/SS_L03_AccountsOffice_Lesson.pptx
+++ b/presentations/SS_L03_AccountsOffice_Lesson.pptx
@@ -2167,7 +2167,7 @@
                 <a:ea typeface="IBM Plex Sans" pitchFamily="34" charset="-122"/>
                 <a:cs typeface="IBM Plex Sans" pitchFamily="34" charset="-120"/>
               </a:rPr>
-              <a:t>A school network holds work belonging to a thousand people on the same machines. Accounts, access levels and groups are how the operating system keeps all of it apart, and how it knows what you are allowed to open.</a:t>
+              <a:t>Every school network gives thousands of people their own space, and lets nobody see anyone else's. Find out how user management and file management make that work.</a:t>
             </a:r>
             <a:endParaRPr lang="en-US" sz="1800" dirty="0"/>
           </a:p>
@@ -3104,7 +3104,7 @@
                 <a:ea typeface="IBM Plex Sans" pitchFamily="34" charset="-122"/>
                 <a:cs typeface="IBM Plex Sans" pitchFamily="34" charset="-120"/>
               </a:rPr>
-              <a:t>A school's shared drive. Give each group the least access that lets it work.</a:t>
+              <a:t>Set the permissions for a school network, then sort the jobs. Tap the star to begin.</a:t>
             </a:r>
             <a:endParaRPr lang="en-US" sz="2200" dirty="0"/>
           </a:p>
@@ -5944,7 +5944,7 @@
         <p:spPr>
           <a:xfrm>
             <a:off x="2889504" y="4535424"/>
-            <a:ext cx="2651760" cy="402336"/>
+            <a:ext cx="2212848" cy="402336"/>
           </a:xfrm>
           <a:prstGeom prst="roundRect">
             <a:avLst>
@@ -5971,7 +5971,7 @@
         <p:spPr>
           <a:xfrm>
             <a:off x="2889504" y="4535424"/>
-            <a:ext cx="2651760" cy="402336"/>
+            <a:ext cx="2212848" cy="402336"/>
           </a:xfrm>
           <a:prstGeom prst="rect">
             <a:avLst/>
@@ -5995,7 +5995,205 @@
                 <a:ea typeface="IBM Plex Sans" pitchFamily="34" charset="-122"/>
                 <a:cs typeface="IBM Plex Sans" pitchFamily="34" charset="-120"/>
               </a:rPr>
-              <a:t>File management</a:t>
+              <a:t>Access level</a:t>
+            </a:r>
+            <a:endParaRPr lang="en-US" sz="1200" dirty="0"/>
+          </a:p>
+        </p:txBody>
+      </p:sp>
+      <p:sp>
+        <p:nvSpPr>
+          <p:cNvPr id="18" name="Shape 16"/>
+          <p:cNvSpPr/>
+          <p:nvPr/>
+        </p:nvSpPr>
+        <p:spPr>
+          <a:xfrm>
+            <a:off x="5230368" y="4535424"/>
+            <a:ext cx="2066544" cy="402336"/>
+          </a:xfrm>
+          <a:prstGeom prst="roundRect">
+            <a:avLst>
+              <a:gd name="adj" fmla="val 50000"/>
+            </a:avLst>
+          </a:prstGeom>
+          <a:solidFill>
+            <a:srgbClr val="FFFFFF"/>
+          </a:solidFill>
+          <a:ln w="12700">
+            <a:solidFill>
+              <a:srgbClr val="2D63FF"/>
+            </a:solidFill>
+            <a:prstDash val="solid"/>
+          </a:ln>
+        </p:spPr>
+      </p:sp>
+      <p:sp>
+        <p:nvSpPr>
+          <p:cNvPr id="19" name="Text 17"/>
+          <p:cNvSpPr txBox="1"/>
+          <p:nvPr/>
+        </p:nvSpPr>
+        <p:spPr>
+          <a:xfrm>
+            <a:off x="5230368" y="4535424"/>
+            <a:ext cx="2066544" cy="402336"/>
+          </a:xfrm>
+          <a:prstGeom prst="rect">
+            <a:avLst/>
+          </a:prstGeom>
+          <a:noFill/>
+          <a:ln/>
+        </p:spPr>
+        <p:txBody>
+          <a:bodyPr wrap="square" lIns="0" tIns="0" rIns="0" bIns="0" rtlCol="0" anchor="ctr"/>
+          <a:lstStyle/>
+          <a:p>
+            <a:pPr algn="ctr" indent="0" marL="0">
+              <a:buNone/>
+            </a:pPr>
+            <a:r>
+              <a:rPr lang="en-US" sz="1200" dirty="0">
+                <a:solidFill>
+                  <a:srgbClr val="2D63FF"/>
+                </a:solidFill>
+                <a:latin typeface="IBM Plex Sans" pitchFamily="34" charset="0"/>
+                <a:ea typeface="IBM Plex Sans" pitchFamily="34" charset="-122"/>
+                <a:cs typeface="IBM Plex Sans" pitchFamily="34" charset="-120"/>
+              </a:rPr>
+              <a:t>Permissions</a:t>
+            </a:r>
+            <a:endParaRPr lang="en-US" sz="1200" dirty="0"/>
+          </a:p>
+        </p:txBody>
+      </p:sp>
+      <p:sp>
+        <p:nvSpPr>
+          <p:cNvPr id="20" name="Shape 18"/>
+          <p:cNvSpPr/>
+          <p:nvPr/>
+        </p:nvSpPr>
+        <p:spPr>
+          <a:xfrm>
+            <a:off x="7424928" y="4535424"/>
+            <a:ext cx="1920240" cy="402336"/>
+          </a:xfrm>
+          <a:prstGeom prst="roundRect">
+            <a:avLst>
+              <a:gd name="adj" fmla="val 50000"/>
+            </a:avLst>
+          </a:prstGeom>
+          <a:solidFill>
+            <a:srgbClr val="FFFFFF"/>
+          </a:solidFill>
+          <a:ln w="12700">
+            <a:solidFill>
+              <a:srgbClr val="2D63FF"/>
+            </a:solidFill>
+            <a:prstDash val="solid"/>
+          </a:ln>
+        </p:spPr>
+      </p:sp>
+      <p:sp>
+        <p:nvSpPr>
+          <p:cNvPr id="21" name="Text 19"/>
+          <p:cNvSpPr txBox="1"/>
+          <p:nvPr/>
+        </p:nvSpPr>
+        <p:spPr>
+          <a:xfrm>
+            <a:off x="7424928" y="4535424"/>
+            <a:ext cx="1920240" cy="402336"/>
+          </a:xfrm>
+          <a:prstGeom prst="rect">
+            <a:avLst/>
+          </a:prstGeom>
+          <a:noFill/>
+          <a:ln/>
+        </p:spPr>
+        <p:txBody>
+          <a:bodyPr wrap="square" lIns="0" tIns="0" rIns="0" bIns="0" rtlCol="0" anchor="ctr"/>
+          <a:lstStyle/>
+          <a:p>
+            <a:pPr algn="ctr" indent="0" marL="0">
+              <a:buNone/>
+            </a:pPr>
+            <a:r>
+              <a:rPr lang="en-US" sz="1200" dirty="0">
+                <a:solidFill>
+                  <a:srgbClr val="2D63FF"/>
+                </a:solidFill>
+                <a:latin typeface="IBM Plex Sans" pitchFamily="34" charset="0"/>
+                <a:ea typeface="IBM Plex Sans" pitchFamily="34" charset="-122"/>
+                <a:cs typeface="IBM Plex Sans" pitchFamily="34" charset="-120"/>
+              </a:rPr>
+              <a:t>User group</a:t>
+            </a:r>
+            <a:endParaRPr lang="en-US" sz="1200" dirty="0"/>
+          </a:p>
+        </p:txBody>
+      </p:sp>
+      <p:sp>
+        <p:nvSpPr>
+          <p:cNvPr id="22" name="Shape 20"/>
+          <p:cNvSpPr/>
+          <p:nvPr/>
+        </p:nvSpPr>
+        <p:spPr>
+          <a:xfrm>
+            <a:off x="9473184" y="4535424"/>
+            <a:ext cx="1042416" cy="402336"/>
+          </a:xfrm>
+          <a:prstGeom prst="roundRect">
+            <a:avLst>
+              <a:gd name="adj" fmla="val 50000"/>
+            </a:avLst>
+          </a:prstGeom>
+          <a:solidFill>
+            <a:srgbClr val="FFFFFF"/>
+          </a:solidFill>
+          <a:ln w="12700">
+            <a:solidFill>
+              <a:srgbClr val="2D63FF"/>
+            </a:solidFill>
+            <a:prstDash val="solid"/>
+          </a:ln>
+        </p:spPr>
+      </p:sp>
+      <p:sp>
+        <p:nvSpPr>
+          <p:cNvPr id="23" name="Text 21"/>
+          <p:cNvSpPr txBox="1"/>
+          <p:nvPr/>
+        </p:nvSpPr>
+        <p:spPr>
+          <a:xfrm>
+            <a:off x="9473184" y="4535424"/>
+            <a:ext cx="1042416" cy="402336"/>
+          </a:xfrm>
+          <a:prstGeom prst="rect">
+            <a:avLst/>
+          </a:prstGeom>
+          <a:noFill/>
+          <a:ln/>
+        </p:spPr>
+        <p:txBody>
+          <a:bodyPr wrap="square" lIns="0" tIns="0" rIns="0" bIns="0" rtlCol="0" anchor="ctr"/>
+          <a:lstStyle/>
+          <a:p>
+            <a:pPr algn="ctr" indent="0" marL="0">
+              <a:buNone/>
+            </a:pPr>
+            <a:r>
+              <a:rPr lang="en-US" sz="1200" dirty="0">
+                <a:solidFill>
+                  <a:srgbClr val="2D63FF"/>
+                </a:solidFill>
+                <a:latin typeface="IBM Plex Sans" pitchFamily="34" charset="0"/>
+                <a:ea typeface="IBM Plex Sans" pitchFamily="34" charset="-122"/>
+                <a:cs typeface="IBM Plex Sans" pitchFamily="34" charset="-120"/>
+              </a:rPr>
+              <a:t>File</a:t>
             </a:r>
             <a:endParaRPr lang="en-US" sz="1200" dirty="0"/>
           </a:p>

--- a/presentations/SS_L03_AccountsOffice_Lesson.pptx
+++ b/presentations/SS_L03_AccountsOffice_Lesson.pptx
@@ -19,9 +19,10 @@
     <p:sldId id="267" r:id="rId13"/>
     <p:sldId id="268" r:id="rId14"/>
     <p:sldId id="269" r:id="rId15"/>
+    <p:sldId id="270" r:id="rId16"/>
   </p:sldIdLst>
   <p:notesMasterIdLst>
-    <p:notesMasterId r:id="rId16"/>
+    <p:notesMasterId r:id="rId17"/>
   </p:notesMasterIdLst>
   <p:sldSz cx="12192000" cy="6858000"/>
   <p:notesSz cx="6858000" cy="12192000"/>
@@ -692,7 +693,13 @@
           <a:p>
             <a:r>
               <a:rPr lang="en-US" dirty="0"/>
-              <a:t>Make them commit to an answer on paper before they tap the star. Guessing first costs them the learning.</a:t>
+              <a:t>The answer is B: Their profile is stored on the network, not on one machine.
+Do not say it yet. Every pupil commits first - fingers, whiteboards or a show of hands on each letter in turn - and you count the split before anyone can change their mind.
+IF MOST OF THE CLASS IS RIGHT: say why it is right in one sentence and go straight on to the independent work.
+IF A SIGNIFICANT GROUP IS ON ONE WRONG LETTER: that option is the misconception to teach against before anyone goes on. Go back to station 3, Groups and profiles, and work through its example again, aloud, with the class watching, then re-ask this question.
+The course's own response to a wrong answer here: It's why any machine in the school feels like yours.
+A limitation, stated rather than papered over: one response covers every wrong option; it does not say what to revisit for each one. The course does not record what each separate wrong option means, and this slide does not invent it. Decide your own reteach for each option before the lesson; the options above are the start of it.
+This is a real activity from the experience (ss-l03-s3-c2), so the wording here is the wording a pupil will see.</a:t>
             </a:r>
             <a:endParaRPr lang="en-US" dirty="0"/>
           </a:p>
@@ -780,7 +787,7 @@
           <a:p>
             <a:r>
               <a:rPr lang="en-US" dirty="0"/>
-              <a:t>Use these as a settler, or as something for early finishers to read in the experience.</a:t>
+              <a:t>Make them commit to an answer on paper before they tap the star. Guessing first costs them the learning.</a:t>
             </a:r>
             <a:endParaRPr lang="en-US" dirty="0"/>
           </a:p>
@@ -868,7 +875,7 @@
           <a:p>
             <a:r>
               <a:rPr lang="en-US" dirty="0"/>
-              <a:t>Timed and silent. Mark against the answer sheet, then ask students to record their weakest area.</a:t>
+              <a:t>Use these as a settler, or as something for early finishers to read in the experience.</a:t>
             </a:r>
             <a:endParaRPr lang="en-US" dirty="0"/>
           </a:p>
@@ -956,7 +963,7 @@
           <a:p>
             <a:r>
               <a:rPr lang="en-US" dirty="0"/>
-              <a:t>Students copy their score-screen breakdown onto the worksheet, then rate themselves here.</a:t>
+              <a:t>Timed and silent. Mark against the answer sheet, then ask students to record their weakest area.</a:t>
             </a:r>
             <a:endParaRPr lang="en-US" dirty="0"/>
           </a:p>
@@ -980,6 +987,94 @@
             <a:fld id="{F7021451-1387-4CA6-816F-3879F97B5CBC}" type="slidenum">
               <a:rPr lang="en-US"/>
               <a:t>14</a:t>
+            </a:fld>
+            <a:endParaRPr lang="en-US"/>
+          </a:p>
+        </p:txBody>
+      </p:sp>
+    </p:spTree>
+    <p:extLst>
+      <p:ext uri="{BB962C8B-B14F-4D97-AF65-F5344CB8AC3E}">
+        <p14:creationId xmlns:p14="http://schemas.microsoft.com/office/powerpoint/2010/main" val="1024086991"/>
+      </p:ext>
+    </p:extLst>
+  </p:cSld>
+  <p:clrMapOvr>
+    <a:masterClrMapping/>
+  </p:clrMapOvr>
+</p:notes>
+</file>
+
+<file path=ppt/notesSlides/notesSlide15.xml><?xml version="1.0" encoding="utf-8"?>
+<p:notes xmlns:a="http://schemas.openxmlformats.org/drawingml/2006/main" xmlns:r="http://schemas.openxmlformats.org/officeDocument/2006/relationships" xmlns:p="http://schemas.openxmlformats.org/presentationml/2006/main">
+  <p:cSld>
+    <p:spTree>
+      <p:nvGrpSpPr>
+        <p:cNvPr id="1" name=""/>
+        <p:cNvGrpSpPr/>
+        <p:nvPr/>
+      </p:nvGrpSpPr>
+      <p:grpSpPr>
+        <a:xfrm>
+          <a:off x="0" y="0"/>
+          <a:ext cx="0" cy="0"/>
+          <a:chOff x="0" y="0"/>
+          <a:chExt cx="0" cy="0"/>
+        </a:xfrm>
+      </p:grpSpPr>
+      <p:sp>
+        <p:nvSpPr>
+          <p:cNvPr id="2" name="Slide Image Placeholder 1"/>
+          <p:cNvSpPr>
+            <a:spLocks noGrp="1" noRot="1" noChangeAspect="1"/>
+          </p:cNvSpPr>
+          <p:nvPr>
+            <p:ph type="sldImg"/>
+          </p:nvPr>
+        </p:nvSpPr>
+        <p:spPr/>
+      </p:sp>
+      <p:sp>
+        <p:nvSpPr>
+          <p:cNvPr id="3" name="Notes Placeholder 2"/>
+          <p:cNvSpPr>
+            <a:spLocks noGrp="1"/>
+          </p:cNvSpPr>
+          <p:nvPr>
+            <p:ph type="body" idx="1"/>
+          </p:nvPr>
+        </p:nvSpPr>
+        <p:spPr/>
+        <p:txBody>
+          <a:bodyPr/>
+          <a:lstStyle/>
+          <a:p>
+            <a:r>
+              <a:rPr lang="en-US" dirty="0"/>
+              <a:t>Students copy their score-screen breakdown onto the worksheet, then rate themselves here.</a:t>
+            </a:r>
+            <a:endParaRPr lang="en-US" dirty="0"/>
+          </a:p>
+        </p:txBody>
+      </p:sp>
+      <p:sp>
+        <p:nvSpPr>
+          <p:cNvPr id="4" name="Slide Number Placeholder 3"/>
+          <p:cNvSpPr>
+            <a:spLocks noGrp="1"/>
+          </p:cNvSpPr>
+          <p:nvPr>
+            <p:ph type="sldNum" sz="quarter" idx="10"/>
+          </p:nvPr>
+        </p:nvSpPr>
+        <p:spPr/>
+        <p:txBody>
+          <a:bodyPr/>
+          <a:lstStyle/>
+          <a:p>
+            <a:fld id="{F7021451-1387-4CA6-816F-3879F97B5CBC}" type="slidenum">
+              <a:rPr lang="en-US"/>
+              <a:t>15</a:t>
             </a:fld>
             <a:endParaRPr lang="en-US"/>
           </a:p>
@@ -2949,12 +3044,12 @@
         </p:nvSpPr>
         <p:spPr>
           <a:xfrm>
-            <a:off x="502920" y="438912"/>
-            <a:ext cx="3108960" cy="502920"/>
+            <a:off x="502920" y="457200"/>
+            <a:ext cx="1051560" cy="420624"/>
           </a:xfrm>
           <a:prstGeom prst="roundRect">
             <a:avLst>
-              <a:gd name="adj" fmla="val 18182"/>
+              <a:gd name="adj" fmla="val 21739"/>
             </a:avLst>
           </a:prstGeom>
           <a:solidFill>
@@ -2971,8 +3066,8 @@
         </p:nvSpPr>
         <p:spPr>
           <a:xfrm>
-            <a:off x="502920" y="438912"/>
-            <a:ext cx="3108960" cy="502920"/>
+            <a:off x="502920" y="457200"/>
+            <a:ext cx="1051560" cy="420624"/>
           </a:xfrm>
           <a:prstGeom prst="rect">
             <a:avLst/>
@@ -2988,7 +3083,7 @@
               <a:buNone/>
             </a:pPr>
             <a:r>
-              <a:rPr lang="en-US" sz="1300" b="1" dirty="0">
+              <a:rPr lang="en-US" sz="1200" b="1" dirty="0">
                 <a:solidFill>
                   <a:srgbClr val="101828"/>
                 </a:solidFill>
@@ -2996,9 +3091,9 @@
                 <a:ea typeface="IBM Plex Mono" pitchFamily="34" charset="-122"/>
                 <a:cs typeface="IBM Plex Mono" pitchFamily="34" charset="-120"/>
               </a:rPr>
-              <a:t>★  FINAL CHALLENGE</a:t>
-            </a:r>
-            <a:endParaRPr lang="en-US" sz="1300" dirty="0"/>
+              <a:t>CHECK</a:t>
+            </a:r>
+            <a:endParaRPr lang="en-US" sz="1200" dirty="0"/>
           </a:p>
         </p:txBody>
       </p:sp>
@@ -3010,8 +3105,8 @@
         </p:nvSpPr>
         <p:spPr>
           <a:xfrm>
-            <a:off x="502920" y="1097280"/>
-            <a:ext cx="11155680" cy="731520"/>
+            <a:off x="1737360" y="457200"/>
+            <a:ext cx="9875520" cy="420624"/>
           </a:xfrm>
           <a:prstGeom prst="rect">
             <a:avLst/>
@@ -3027,34 +3122,76 @@
               <a:buNone/>
             </a:pPr>
             <a:r>
-              <a:rPr lang="en-US" sz="3400" b="1" dirty="0">
-                <a:solidFill>
-                  <a:srgbClr val="101828"/>
+              <a:rPr lang="en-US" sz="1500" dirty="0">
+                <a:solidFill>
+                  <a:srgbClr val="667085"/>
                 </a:solidFill>
                 <a:latin typeface="IBM Plex Sans" pitchFamily="34" charset="0"/>
                 <a:ea typeface="IBM Plex Sans" pitchFamily="34" charset="-122"/>
                 <a:cs typeface="IBM Plex Sans" pitchFamily="34" charset="-120"/>
               </a:rPr>
-              <a:t>Lock down the network</a:t>
-            </a:r>
-            <a:endParaRPr lang="en-US" sz="3400" dirty="0"/>
-          </a:p>
-        </p:txBody>
-      </p:sp>
-      <p:sp>
-        <p:nvSpPr>
-          <p:cNvPr id="8" name="Shape 6"/>
+              <a:t>Hands down. Everyone commits.</a:t>
+            </a:r>
+            <a:endParaRPr lang="en-US" sz="1500" dirty="0"/>
+          </a:p>
+        </p:txBody>
+      </p:sp>
+      <p:sp>
+        <p:nvSpPr>
+          <p:cNvPr id="8" name="Text 6"/>
+          <p:cNvSpPr txBox="1"/>
+          <p:nvPr/>
+        </p:nvSpPr>
+        <p:spPr>
+          <a:xfrm>
+            <a:off x="502920" y="1097280"/>
+            <a:ext cx="11155680" cy="914400"/>
+          </a:xfrm>
+          <a:prstGeom prst="rect">
+            <a:avLst/>
+          </a:prstGeom>
+          <a:noFill/>
+          <a:ln/>
+        </p:spPr>
+        <p:txBody>
+          <a:bodyPr wrap="square" lIns="0" tIns="0" rIns="0" bIns="0" rtlCol="0" anchor="ctr"/>
+          <a:lstStyle/>
+          <a:p>
+            <a:pPr indent="0" marL="0">
+              <a:lnSpc>
+                <a:spcPct val="115000"/>
+              </a:lnSpc>
+              <a:buNone/>
+            </a:pPr>
+            <a:r>
+              <a:rPr lang="en-US" sz="2600" b="1" dirty="0">
+                <a:solidFill>
+                  <a:srgbClr val="101828"/>
+                </a:solidFill>
+                <a:latin typeface="IBM Plex Sans" pitchFamily="34" charset="0"/>
+                <a:ea typeface="IBM Plex Sans" pitchFamily="34" charset="-122"/>
+                <a:cs typeface="IBM Plex Sans" pitchFamily="34" charset="-120"/>
+              </a:rPr>
+              <a:t>A user signs in to a different computer and finds their own desktop and documents. What made that possible?</a:t>
+            </a:r>
+            <a:endParaRPr lang="en-US" sz="2600" dirty="0"/>
+          </a:p>
+        </p:txBody>
+      </p:sp>
+      <p:sp>
+        <p:nvSpPr>
+          <p:cNvPr id="9" name="Shape 7"/>
           <p:cNvSpPr/>
           <p:nvPr/>
         </p:nvSpPr>
         <p:spPr>
           <a:xfrm>
-            <a:off x="502920" y="2011680"/>
-            <a:ext cx="11155680" cy="2194560"/>
+            <a:off x="502920" y="2148840"/>
+            <a:ext cx="11155680" cy="731520"/>
           </a:xfrm>
           <a:prstGeom prst="roundRect">
             <a:avLst>
-              <a:gd name="adj" fmla="val 5000"/>
+              <a:gd name="adj" fmla="val 15000"/>
             </a:avLst>
           </a:prstGeom>
           <a:solidFill>
@@ -3062,7 +3199,7 @@
           </a:solidFill>
           <a:ln w="15875">
             <a:solidFill>
-              <a:srgbClr val="2D63FF"/>
+              <a:srgbClr val="D9DEE7"/>
             </a:solidFill>
             <a:prstDash val="solid"/>
           </a:ln>
@@ -3070,14 +3207,75 @@
       </p:sp>
       <p:sp>
         <p:nvSpPr>
-          <p:cNvPr id="9" name="Text 7"/>
-          <p:cNvSpPr txBox="1"/>
-          <p:nvPr/>
-        </p:nvSpPr>
-        <p:spPr>
-          <a:xfrm>
-            <a:off x="1005840" y="2331720"/>
-            <a:ext cx="10149840" cy="1554480"/>
+          <p:cNvPr id="10" name="Shape 8"/>
+          <p:cNvSpPr/>
+          <p:nvPr/>
+        </p:nvSpPr>
+        <p:spPr>
+          <a:xfrm>
+            <a:off x="777240" y="2295144"/>
+            <a:ext cx="438912" cy="438912"/>
+          </a:xfrm>
+          <a:prstGeom prst="roundRect">
+            <a:avLst>
+              <a:gd name="adj" fmla="val 20833"/>
+            </a:avLst>
+          </a:prstGeom>
+          <a:solidFill>
+            <a:srgbClr val="EEF2FB"/>
+          </a:solidFill>
+          <a:ln/>
+        </p:spPr>
+      </p:sp>
+      <p:sp>
+        <p:nvSpPr>
+          <p:cNvPr id="11" name="Text 9"/>
+          <p:cNvSpPr txBox="1"/>
+          <p:nvPr/>
+        </p:nvSpPr>
+        <p:spPr>
+          <a:xfrm>
+            <a:off x="777240" y="2295144"/>
+            <a:ext cx="438912" cy="438912"/>
+          </a:xfrm>
+          <a:prstGeom prst="rect">
+            <a:avLst/>
+          </a:prstGeom>
+          <a:noFill/>
+          <a:ln/>
+        </p:spPr>
+        <p:txBody>
+          <a:bodyPr wrap="square" lIns="0" tIns="0" rIns="0" bIns="0" rtlCol="0" anchor="ctr"/>
+          <a:lstStyle/>
+          <a:p>
+            <a:pPr algn="ctr" indent="0" marL="0">
+              <a:buNone/>
+            </a:pPr>
+            <a:r>
+              <a:rPr lang="en-US" sz="1300" b="1" dirty="0">
+                <a:solidFill>
+                  <a:srgbClr val="2D63FF"/>
+                </a:solidFill>
+                <a:latin typeface="IBM Plex Mono" pitchFamily="34" charset="0"/>
+                <a:ea typeface="IBM Plex Mono" pitchFamily="34" charset="-122"/>
+                <a:cs typeface="IBM Plex Mono" pitchFamily="34" charset="-120"/>
+              </a:rPr>
+              <a:t>A</a:t>
+            </a:r>
+            <a:endParaRPr lang="en-US" sz="1300" dirty="0"/>
+          </a:p>
+        </p:txBody>
+      </p:sp>
+      <p:sp>
+        <p:nvSpPr>
+          <p:cNvPr id="12" name="Text 10"/>
+          <p:cNvSpPr txBox="1"/>
+          <p:nvPr/>
+        </p:nvSpPr>
+        <p:spPr>
+          <a:xfrm>
+            <a:off x="1417320" y="2148840"/>
+            <a:ext cx="10058400" cy="731520"/>
           </a:xfrm>
           <a:prstGeom prst="rect">
             <a:avLst/>
@@ -3091,12 +3289,12 @@
           <a:p>
             <a:pPr indent="0" marL="0">
               <a:lnSpc>
-                <a:spcPct val="130000"/>
+                <a:spcPct val="115000"/>
               </a:lnSpc>
               <a:buNone/>
             </a:pPr>
             <a:r>
-              <a:rPr lang="en-US" sz="2200" dirty="0">
+              <a:rPr lang="en-US" sz="1700" dirty="0">
                 <a:solidFill>
                   <a:srgbClr val="101828"/>
                 </a:solidFill>
@@ -3104,22 +3302,110 @@
                 <a:ea typeface="IBM Plex Sans" pitchFamily="34" charset="-122"/>
                 <a:cs typeface="IBM Plex Sans" pitchFamily="34" charset="-120"/>
               </a:rPr>
-              <a:t>Set the permissions for a school network, then sort the jobs. Tap the star to begin.</a:t>
-            </a:r>
-            <a:endParaRPr lang="en-US" sz="2200" dirty="0"/>
-          </a:p>
-        </p:txBody>
-      </p:sp>
-      <p:sp>
-        <p:nvSpPr>
-          <p:cNvPr id="10" name="Text 8"/>
-          <p:cNvSpPr txBox="1"/>
-          <p:nvPr/>
-        </p:nvSpPr>
-        <p:spPr>
-          <a:xfrm>
-            <a:off x="502920" y="4526280"/>
-            <a:ext cx="11155680" cy="457200"/>
+              <a:t>The OS guessed the settings</a:t>
+            </a:r>
+            <a:endParaRPr lang="en-US" sz="1700" dirty="0"/>
+          </a:p>
+        </p:txBody>
+      </p:sp>
+      <p:sp>
+        <p:nvSpPr>
+          <p:cNvPr id="13" name="Shape 11"/>
+          <p:cNvSpPr/>
+          <p:nvPr/>
+        </p:nvSpPr>
+        <p:spPr>
+          <a:xfrm>
+            <a:off x="502920" y="3017520"/>
+            <a:ext cx="11155680" cy="731520"/>
+          </a:xfrm>
+          <a:prstGeom prst="roundRect">
+            <a:avLst>
+              <a:gd name="adj" fmla="val 15000"/>
+            </a:avLst>
+          </a:prstGeom>
+          <a:solidFill>
+            <a:srgbClr val="FFFFFF"/>
+          </a:solidFill>
+          <a:ln w="15875">
+            <a:solidFill>
+              <a:srgbClr val="D9DEE7"/>
+            </a:solidFill>
+            <a:prstDash val="solid"/>
+          </a:ln>
+        </p:spPr>
+      </p:sp>
+      <p:sp>
+        <p:nvSpPr>
+          <p:cNvPr id="14" name="Shape 12"/>
+          <p:cNvSpPr/>
+          <p:nvPr/>
+        </p:nvSpPr>
+        <p:spPr>
+          <a:xfrm>
+            <a:off x="777240" y="3163824"/>
+            <a:ext cx="438912" cy="438912"/>
+          </a:xfrm>
+          <a:prstGeom prst="roundRect">
+            <a:avLst>
+              <a:gd name="adj" fmla="val 20833"/>
+            </a:avLst>
+          </a:prstGeom>
+          <a:solidFill>
+            <a:srgbClr val="EEF2FB"/>
+          </a:solidFill>
+          <a:ln/>
+        </p:spPr>
+      </p:sp>
+      <p:sp>
+        <p:nvSpPr>
+          <p:cNvPr id="15" name="Text 13"/>
+          <p:cNvSpPr txBox="1"/>
+          <p:nvPr/>
+        </p:nvSpPr>
+        <p:spPr>
+          <a:xfrm>
+            <a:off x="777240" y="3163824"/>
+            <a:ext cx="438912" cy="438912"/>
+          </a:xfrm>
+          <a:prstGeom prst="rect">
+            <a:avLst/>
+          </a:prstGeom>
+          <a:noFill/>
+          <a:ln/>
+        </p:spPr>
+        <p:txBody>
+          <a:bodyPr wrap="square" lIns="0" tIns="0" rIns="0" bIns="0" rtlCol="0" anchor="ctr"/>
+          <a:lstStyle/>
+          <a:p>
+            <a:pPr algn="ctr" indent="0" marL="0">
+              <a:buNone/>
+            </a:pPr>
+            <a:r>
+              <a:rPr lang="en-US" sz="1300" b="1" dirty="0">
+                <a:solidFill>
+                  <a:srgbClr val="2D63FF"/>
+                </a:solidFill>
+                <a:latin typeface="IBM Plex Mono" pitchFamily="34" charset="0"/>
+                <a:ea typeface="IBM Plex Mono" pitchFamily="34" charset="-122"/>
+                <a:cs typeface="IBM Plex Mono" pitchFamily="34" charset="-120"/>
+              </a:rPr>
+              <a:t>B</a:t>
+            </a:r>
+            <a:endParaRPr lang="en-US" sz="1300" dirty="0"/>
+          </a:p>
+        </p:txBody>
+      </p:sp>
+      <p:sp>
+        <p:nvSpPr>
+          <p:cNvPr id="16" name="Text 14"/>
+          <p:cNvSpPr txBox="1"/>
+          <p:nvPr/>
+        </p:nvSpPr>
+        <p:spPr>
+          <a:xfrm>
+            <a:off x="1417320" y="3017520"/>
+            <a:ext cx="10058400" cy="731520"/>
           </a:xfrm>
           <a:prstGeom prst="rect">
             <a:avLst/>
@@ -3132,20 +3418,283 @@
           <a:lstStyle/>
           <a:p>
             <a:pPr indent="0" marL="0">
-              <a:buNone/>
-            </a:pPr>
-            <a:r>
-              <a:rPr lang="en-US" sz="1600" dirty="0">
-                <a:solidFill>
-                  <a:srgbClr val="667085"/>
+              <a:lnSpc>
+                <a:spcPct val="115000"/>
+              </a:lnSpc>
+              <a:buNone/>
+            </a:pPr>
+            <a:r>
+              <a:rPr lang="en-US" sz="1700" dirty="0">
+                <a:solidFill>
+                  <a:srgbClr val="101828"/>
                 </a:solidFill>
                 <a:latin typeface="IBM Plex Sans" pitchFamily="34" charset="0"/>
                 <a:ea typeface="IBM Plex Sans" pitchFamily="34" charset="-122"/>
                 <a:cs typeface="IBM Plex Sans" pitchFamily="34" charset="-120"/>
               </a:rPr>
-              <a:t>Predict on paper first, then look down and test it.</a:t>
-            </a:r>
-            <a:endParaRPr lang="en-US" sz="1600" dirty="0"/>
+              <a:t>Their profile is stored on the network, not on one machine</a:t>
+            </a:r>
+            <a:endParaRPr lang="en-US" sz="1700" dirty="0"/>
+          </a:p>
+        </p:txBody>
+      </p:sp>
+      <p:sp>
+        <p:nvSpPr>
+          <p:cNvPr id="17" name="Shape 15"/>
+          <p:cNvSpPr/>
+          <p:nvPr/>
+        </p:nvSpPr>
+        <p:spPr>
+          <a:xfrm>
+            <a:off x="502920" y="3886200"/>
+            <a:ext cx="11155680" cy="731520"/>
+          </a:xfrm>
+          <a:prstGeom prst="roundRect">
+            <a:avLst>
+              <a:gd name="adj" fmla="val 15000"/>
+            </a:avLst>
+          </a:prstGeom>
+          <a:solidFill>
+            <a:srgbClr val="FFFFFF"/>
+          </a:solidFill>
+          <a:ln w="15875">
+            <a:solidFill>
+              <a:srgbClr val="D9DEE7"/>
+            </a:solidFill>
+            <a:prstDash val="solid"/>
+          </a:ln>
+        </p:spPr>
+      </p:sp>
+      <p:sp>
+        <p:nvSpPr>
+          <p:cNvPr id="18" name="Shape 16"/>
+          <p:cNvSpPr/>
+          <p:nvPr/>
+        </p:nvSpPr>
+        <p:spPr>
+          <a:xfrm>
+            <a:off x="777240" y="4032504"/>
+            <a:ext cx="438912" cy="438912"/>
+          </a:xfrm>
+          <a:prstGeom prst="roundRect">
+            <a:avLst>
+              <a:gd name="adj" fmla="val 20833"/>
+            </a:avLst>
+          </a:prstGeom>
+          <a:solidFill>
+            <a:srgbClr val="EEF2FB"/>
+          </a:solidFill>
+          <a:ln/>
+        </p:spPr>
+      </p:sp>
+      <p:sp>
+        <p:nvSpPr>
+          <p:cNvPr id="19" name="Text 17"/>
+          <p:cNvSpPr txBox="1"/>
+          <p:nvPr/>
+        </p:nvSpPr>
+        <p:spPr>
+          <a:xfrm>
+            <a:off x="777240" y="4032504"/>
+            <a:ext cx="438912" cy="438912"/>
+          </a:xfrm>
+          <a:prstGeom prst="rect">
+            <a:avLst/>
+          </a:prstGeom>
+          <a:noFill/>
+          <a:ln/>
+        </p:spPr>
+        <p:txBody>
+          <a:bodyPr wrap="square" lIns="0" tIns="0" rIns="0" bIns="0" rtlCol="0" anchor="ctr"/>
+          <a:lstStyle/>
+          <a:p>
+            <a:pPr algn="ctr" indent="0" marL="0">
+              <a:buNone/>
+            </a:pPr>
+            <a:r>
+              <a:rPr lang="en-US" sz="1300" b="1" dirty="0">
+                <a:solidFill>
+                  <a:srgbClr val="2D63FF"/>
+                </a:solidFill>
+                <a:latin typeface="IBM Plex Mono" pitchFamily="34" charset="0"/>
+                <a:ea typeface="IBM Plex Mono" pitchFamily="34" charset="-122"/>
+                <a:cs typeface="IBM Plex Mono" pitchFamily="34" charset="-120"/>
+              </a:rPr>
+              <a:t>C</a:t>
+            </a:r>
+            <a:endParaRPr lang="en-US" sz="1300" dirty="0"/>
+          </a:p>
+        </p:txBody>
+      </p:sp>
+      <p:sp>
+        <p:nvSpPr>
+          <p:cNvPr id="20" name="Text 18"/>
+          <p:cNvSpPr txBox="1"/>
+          <p:nvPr/>
+        </p:nvSpPr>
+        <p:spPr>
+          <a:xfrm>
+            <a:off x="1417320" y="3886200"/>
+            <a:ext cx="10058400" cy="731520"/>
+          </a:xfrm>
+          <a:prstGeom prst="rect">
+            <a:avLst/>
+          </a:prstGeom>
+          <a:noFill/>
+          <a:ln/>
+        </p:spPr>
+        <p:txBody>
+          <a:bodyPr wrap="square" lIns="0" tIns="0" rIns="0" bIns="0" rtlCol="0" anchor="ctr"/>
+          <a:lstStyle/>
+          <a:p>
+            <a:pPr indent="0" marL="0">
+              <a:lnSpc>
+                <a:spcPct val="115000"/>
+              </a:lnSpc>
+              <a:buNone/>
+            </a:pPr>
+            <a:r>
+              <a:rPr lang="en-US" sz="1700" dirty="0">
+                <a:solidFill>
+                  <a:srgbClr val="101828"/>
+                </a:solidFill>
+                <a:latin typeface="IBM Plex Sans" pitchFamily="34" charset="0"/>
+                <a:ea typeface="IBM Plex Sans" pitchFamily="34" charset="-122"/>
+                <a:cs typeface="IBM Plex Sans" pitchFamily="34" charset="-120"/>
+              </a:rPr>
+              <a:t>The computers share a keyboard</a:t>
+            </a:r>
+            <a:endParaRPr lang="en-US" sz="1700" dirty="0"/>
+          </a:p>
+        </p:txBody>
+      </p:sp>
+      <p:sp>
+        <p:nvSpPr>
+          <p:cNvPr id="21" name="Shape 19"/>
+          <p:cNvSpPr/>
+          <p:nvPr/>
+        </p:nvSpPr>
+        <p:spPr>
+          <a:xfrm>
+            <a:off x="502920" y="4754880"/>
+            <a:ext cx="11155680" cy="731520"/>
+          </a:xfrm>
+          <a:prstGeom prst="roundRect">
+            <a:avLst>
+              <a:gd name="adj" fmla="val 15000"/>
+            </a:avLst>
+          </a:prstGeom>
+          <a:solidFill>
+            <a:srgbClr val="FFFFFF"/>
+          </a:solidFill>
+          <a:ln w="15875">
+            <a:solidFill>
+              <a:srgbClr val="D9DEE7"/>
+            </a:solidFill>
+            <a:prstDash val="solid"/>
+          </a:ln>
+        </p:spPr>
+      </p:sp>
+      <p:sp>
+        <p:nvSpPr>
+          <p:cNvPr id="22" name="Shape 20"/>
+          <p:cNvSpPr/>
+          <p:nvPr/>
+        </p:nvSpPr>
+        <p:spPr>
+          <a:xfrm>
+            <a:off x="777240" y="4901184"/>
+            <a:ext cx="438912" cy="438912"/>
+          </a:xfrm>
+          <a:prstGeom prst="roundRect">
+            <a:avLst>
+              <a:gd name="adj" fmla="val 20833"/>
+            </a:avLst>
+          </a:prstGeom>
+          <a:solidFill>
+            <a:srgbClr val="EEF2FB"/>
+          </a:solidFill>
+          <a:ln/>
+        </p:spPr>
+      </p:sp>
+      <p:sp>
+        <p:nvSpPr>
+          <p:cNvPr id="23" name="Text 21"/>
+          <p:cNvSpPr txBox="1"/>
+          <p:nvPr/>
+        </p:nvSpPr>
+        <p:spPr>
+          <a:xfrm>
+            <a:off x="777240" y="4901184"/>
+            <a:ext cx="438912" cy="438912"/>
+          </a:xfrm>
+          <a:prstGeom prst="rect">
+            <a:avLst/>
+          </a:prstGeom>
+          <a:noFill/>
+          <a:ln/>
+        </p:spPr>
+        <p:txBody>
+          <a:bodyPr wrap="square" lIns="0" tIns="0" rIns="0" bIns="0" rtlCol="0" anchor="ctr"/>
+          <a:lstStyle/>
+          <a:p>
+            <a:pPr algn="ctr" indent="0" marL="0">
+              <a:buNone/>
+            </a:pPr>
+            <a:r>
+              <a:rPr lang="en-US" sz="1300" b="1" dirty="0">
+                <a:solidFill>
+                  <a:srgbClr val="2D63FF"/>
+                </a:solidFill>
+                <a:latin typeface="IBM Plex Mono" pitchFamily="34" charset="0"/>
+                <a:ea typeface="IBM Plex Mono" pitchFamily="34" charset="-122"/>
+                <a:cs typeface="IBM Plex Mono" pitchFamily="34" charset="-120"/>
+              </a:rPr>
+              <a:t>D</a:t>
+            </a:r>
+            <a:endParaRPr lang="en-US" sz="1300" dirty="0"/>
+          </a:p>
+        </p:txBody>
+      </p:sp>
+      <p:sp>
+        <p:nvSpPr>
+          <p:cNvPr id="24" name="Text 22"/>
+          <p:cNvSpPr txBox="1"/>
+          <p:nvPr/>
+        </p:nvSpPr>
+        <p:spPr>
+          <a:xfrm>
+            <a:off x="1417320" y="4754880"/>
+            <a:ext cx="10058400" cy="731520"/>
+          </a:xfrm>
+          <a:prstGeom prst="rect">
+            <a:avLst/>
+          </a:prstGeom>
+          <a:noFill/>
+          <a:ln/>
+        </p:spPr>
+        <p:txBody>
+          <a:bodyPr wrap="square" lIns="0" tIns="0" rIns="0" bIns="0" rtlCol="0" anchor="ctr"/>
+          <a:lstStyle/>
+          <a:p>
+            <a:pPr indent="0" marL="0">
+              <a:lnSpc>
+                <a:spcPct val="115000"/>
+              </a:lnSpc>
+              <a:buNone/>
+            </a:pPr>
+            <a:r>
+              <a:rPr lang="en-US" sz="1700" dirty="0">
+                <a:solidFill>
+                  <a:srgbClr val="101828"/>
+                </a:solidFill>
+                <a:latin typeface="IBM Plex Sans" pitchFamily="34" charset="0"/>
+                <a:ea typeface="IBM Plex Sans" pitchFamily="34" charset="-122"/>
+                <a:cs typeface="IBM Plex Sans" pitchFamily="34" charset="-120"/>
+              </a:rPr>
+              <a:t>The files were emailed</a:t>
+            </a:r>
+            <a:endParaRPr lang="en-US" sz="1700" dirty="0"/>
           </a:p>
         </p:txBody>
       </p:sp>
@@ -3281,14 +3830,75 @@
       </p:sp>
       <p:sp>
         <p:nvSpPr>
-          <p:cNvPr id="5" name="Text 3"/>
-          <p:cNvSpPr txBox="1"/>
-          <p:nvPr/>
-        </p:nvSpPr>
-        <p:spPr>
-          <a:xfrm>
-            <a:off x="502920" y="411480"/>
-            <a:ext cx="11155680" cy="777240"/>
+          <p:cNvPr id="5" name="Shape 3"/>
+          <p:cNvSpPr/>
+          <p:nvPr/>
+        </p:nvSpPr>
+        <p:spPr>
+          <a:xfrm>
+            <a:off x="502920" y="438912"/>
+            <a:ext cx="3108960" cy="502920"/>
+          </a:xfrm>
+          <a:prstGeom prst="roundRect">
+            <a:avLst>
+              <a:gd name="adj" fmla="val 18182"/>
+            </a:avLst>
+          </a:prstGeom>
+          <a:solidFill>
+            <a:srgbClr val="F4B942"/>
+          </a:solidFill>
+          <a:ln/>
+        </p:spPr>
+      </p:sp>
+      <p:sp>
+        <p:nvSpPr>
+          <p:cNvPr id="6" name="Text 4"/>
+          <p:cNvSpPr txBox="1"/>
+          <p:nvPr/>
+        </p:nvSpPr>
+        <p:spPr>
+          <a:xfrm>
+            <a:off x="502920" y="438912"/>
+            <a:ext cx="3108960" cy="502920"/>
+          </a:xfrm>
+          <a:prstGeom prst="rect">
+            <a:avLst/>
+          </a:prstGeom>
+          <a:noFill/>
+          <a:ln/>
+        </p:spPr>
+        <p:txBody>
+          <a:bodyPr wrap="square" lIns="0" tIns="0" rIns="0" bIns="0" rtlCol="0" anchor="ctr"/>
+          <a:lstStyle/>
+          <a:p>
+            <a:pPr algn="ctr" indent="0" marL="0">
+              <a:buNone/>
+            </a:pPr>
+            <a:r>
+              <a:rPr lang="en-US" sz="1300" b="1" dirty="0">
+                <a:solidFill>
+                  <a:srgbClr val="101828"/>
+                </a:solidFill>
+                <a:latin typeface="IBM Plex Mono" pitchFamily="34" charset="0"/>
+                <a:ea typeface="IBM Plex Mono" pitchFamily="34" charset="-122"/>
+                <a:cs typeface="IBM Plex Mono" pitchFamily="34" charset="-120"/>
+              </a:rPr>
+              <a:t>★  FINAL CHALLENGE</a:t>
+            </a:r>
+            <a:endParaRPr lang="en-US" sz="1300" dirty="0"/>
+          </a:p>
+        </p:txBody>
+      </p:sp>
+      <p:sp>
+        <p:nvSpPr>
+          <p:cNvPr id="7" name="Text 5"/>
+          <p:cNvSpPr txBox="1"/>
+          <p:nvPr/>
+        </p:nvSpPr>
+        <p:spPr>
+          <a:xfrm>
+            <a:off x="502920" y="1097280"/>
+            <a:ext cx="11155680" cy="731520"/>
           </a:xfrm>
           <a:prstGeom prst="rect">
             <a:avLst/>
@@ -3304,7 +3914,7 @@
               <a:buNone/>
             </a:pPr>
             <a:r>
-              <a:rPr lang="en-US" sz="3200" b="1" dirty="0">
+              <a:rPr lang="en-US" sz="3400" b="1" dirty="0">
                 <a:solidFill>
                   <a:srgbClr val="101828"/>
                 </a:solidFill>
@@ -3312,65 +3922,26 @@
                 <a:ea typeface="IBM Plex Sans" pitchFamily="34" charset="-122"/>
                 <a:cs typeface="IBM Plex Sans" pitchFamily="34" charset="-120"/>
               </a:rPr>
-              <a:t>Worth knowing</a:t>
-            </a:r>
-            <a:endParaRPr lang="en-US" sz="3200" dirty="0"/>
-          </a:p>
-        </p:txBody>
-      </p:sp>
-      <p:sp>
-        <p:nvSpPr>
-          <p:cNvPr id="6" name="Text 4"/>
-          <p:cNvSpPr txBox="1"/>
-          <p:nvPr/>
-        </p:nvSpPr>
-        <p:spPr>
-          <a:xfrm>
-            <a:off x="502920" y="1170432"/>
-            <a:ext cx="11155680" cy="411480"/>
-          </a:xfrm>
-          <a:prstGeom prst="rect">
-            <a:avLst/>
-          </a:prstGeom>
-          <a:noFill/>
-          <a:ln/>
-        </p:spPr>
-        <p:txBody>
-          <a:bodyPr wrap="square" lIns="0" tIns="0" rIns="0" bIns="0" rtlCol="0" anchor="ctr"/>
-          <a:lstStyle/>
-          <a:p>
-            <a:pPr indent="0" marL="0">
-              <a:buNone/>
-            </a:pPr>
-            <a:r>
-              <a:rPr lang="en-US" sz="1500" dirty="0">
-                <a:solidFill>
-                  <a:srgbClr val="667085"/>
-                </a:solidFill>
-                <a:latin typeface="IBM Plex Sans" pitchFamily="34" charset="0"/>
-                <a:ea typeface="IBM Plex Sans" pitchFamily="34" charset="-122"/>
-                <a:cs typeface="IBM Plex Sans" pitchFamily="34" charset="-120"/>
-              </a:rPr>
-              <a:t>The information markers dotted around the room</a:t>
-            </a:r>
-            <a:endParaRPr lang="en-US" sz="1500" dirty="0"/>
-          </a:p>
-        </p:txBody>
-      </p:sp>
-      <p:sp>
-        <p:nvSpPr>
-          <p:cNvPr id="7" name="Shape 5"/>
+              <a:t>Lock down the network</a:t>
+            </a:r>
+            <a:endParaRPr lang="en-US" sz="3400" dirty="0"/>
+          </a:p>
+        </p:txBody>
+      </p:sp>
+      <p:sp>
+        <p:nvSpPr>
+          <p:cNvPr id="8" name="Shape 6"/>
           <p:cNvSpPr/>
           <p:nvPr/>
         </p:nvSpPr>
         <p:spPr>
           <a:xfrm>
-            <a:off x="502920" y="1828800"/>
-            <a:ext cx="5394960" cy="1737360"/>
+            <a:off x="502920" y="2011680"/>
+            <a:ext cx="11155680" cy="2194560"/>
           </a:xfrm>
           <a:prstGeom prst="roundRect">
             <a:avLst>
-              <a:gd name="adj" fmla="val 6316"/>
+              <a:gd name="adj" fmla="val 5000"/>
             </a:avLst>
           </a:prstGeom>
           <a:solidFill>
@@ -3386,14 +3957,14 @@
       </p:sp>
       <p:sp>
         <p:nvSpPr>
-          <p:cNvPr id="8" name="Text 6"/>
-          <p:cNvSpPr txBox="1"/>
-          <p:nvPr/>
-        </p:nvSpPr>
-        <p:spPr>
-          <a:xfrm>
-            <a:off x="822960" y="2011680"/>
-            <a:ext cx="4754880" cy="365760"/>
+          <p:cNvPr id="9" name="Text 7"/>
+          <p:cNvSpPr txBox="1"/>
+          <p:nvPr/>
+        </p:nvSpPr>
+        <p:spPr>
+          <a:xfrm>
+            <a:off x="1005840" y="2331720"/>
+            <a:ext cx="10149840" cy="1554480"/>
           </a:xfrm>
           <a:prstGeom prst="rect">
             <a:avLst/>
@@ -3406,52 +3977,52 @@
           <a:lstStyle/>
           <a:p>
             <a:pPr indent="0" marL="0">
-              <a:buNone/>
-            </a:pPr>
-            <a:r>
-              <a:rPr lang="en-US" sz="1600" b="1" dirty="0">
-                <a:solidFill>
-                  <a:srgbClr val="2D63FF"/>
+              <a:lnSpc>
+                <a:spcPct val="130000"/>
+              </a:lnSpc>
+              <a:buNone/>
+            </a:pPr>
+            <a:r>
+              <a:rPr lang="en-US" sz="2200" dirty="0">
+                <a:solidFill>
+                  <a:srgbClr val="101828"/>
                 </a:solidFill>
                 <a:latin typeface="IBM Plex Sans" pitchFamily="34" charset="0"/>
                 <a:ea typeface="IBM Plex Sans" pitchFamily="34" charset="-122"/>
                 <a:cs typeface="IBM Plex Sans" pitchFamily="34" charset="-120"/>
               </a:rPr>
-              <a:t>Least privilege</a:t>
-            </a:r>
-            <a:endParaRPr lang="en-US" sz="1600" dirty="0"/>
-          </a:p>
-        </p:txBody>
-      </p:sp>
-      <p:sp>
-        <p:nvSpPr>
-          <p:cNvPr id="9" name="Text 7"/>
-          <p:cNvSpPr txBox="1"/>
-          <p:nvPr/>
-        </p:nvSpPr>
-        <p:spPr>
-          <a:xfrm>
-            <a:off x="822960" y="2395728"/>
-            <a:ext cx="4754880" cy="1005840"/>
-          </a:xfrm>
-          <a:prstGeom prst="rect">
-            <a:avLst/>
-          </a:prstGeom>
-          <a:noFill/>
-          <a:ln/>
-        </p:spPr>
-        <p:txBody>
-          <a:bodyPr wrap="square" lIns="0" tIns="0" rIns="0" bIns="0" rtlCol="0" anchor="t"/>
+              <a:t>Set the permissions for a school network, then sort the jobs. Tap the star to begin.</a:t>
+            </a:r>
+            <a:endParaRPr lang="en-US" sz="2200" dirty="0"/>
+          </a:p>
+        </p:txBody>
+      </p:sp>
+      <p:sp>
+        <p:nvSpPr>
+          <p:cNvPr id="10" name="Text 8"/>
+          <p:cNvSpPr txBox="1"/>
+          <p:nvPr/>
+        </p:nvSpPr>
+        <p:spPr>
+          <a:xfrm>
+            <a:off x="502920" y="4526280"/>
+            <a:ext cx="11155680" cy="457200"/>
+          </a:xfrm>
+          <a:prstGeom prst="rect">
+            <a:avLst/>
+          </a:prstGeom>
+          <a:noFill/>
+          <a:ln/>
+        </p:spPr>
+        <p:txBody>
+          <a:bodyPr wrap="square" lIns="0" tIns="0" rIns="0" bIns="0" rtlCol="0" anchor="ctr"/>
           <a:lstStyle/>
           <a:p>
             <a:pPr indent="0" marL="0">
-              <a:lnSpc>
-                <a:spcPct val="120000"/>
-              </a:lnSpc>
-              <a:buNone/>
-            </a:pPr>
-            <a:r>
-              <a:rPr lang="en-US" sz="1300" dirty="0">
+              <a:buNone/>
+            </a:pPr>
+            <a:r>
+              <a:rPr lang="en-US" sz="1600" dirty="0">
                 <a:solidFill>
                   <a:srgbClr val="667085"/>
                 </a:solidFill>
@@ -3459,333 +4030,9 @@
                 <a:ea typeface="IBM Plex Sans" pitchFamily="34" charset="-122"/>
                 <a:cs typeface="IBM Plex Sans" pitchFamily="34" charset="-120"/>
               </a:rPr>
-              <a:t>Security teams call this the principle of least privilege: give every account the smallest access that still lets the work happen. It limits the damage when an account is stolen.</a:t>
-            </a:r>
-            <a:endParaRPr lang="en-US" sz="1300" dirty="0"/>
-          </a:p>
-        </p:txBody>
-      </p:sp>
-      <p:sp>
-        <p:nvSpPr>
-          <p:cNvPr id="10" name="Shape 8"/>
-          <p:cNvSpPr/>
-          <p:nvPr/>
-        </p:nvSpPr>
-        <p:spPr>
-          <a:xfrm>
-            <a:off x="6217920" y="1828800"/>
-            <a:ext cx="5394960" cy="1737360"/>
-          </a:xfrm>
-          <a:prstGeom prst="roundRect">
-            <a:avLst>
-              <a:gd name="adj" fmla="val 6316"/>
-            </a:avLst>
-          </a:prstGeom>
-          <a:solidFill>
-            <a:srgbClr val="FFFFFF"/>
-          </a:solidFill>
-          <a:ln w="15875">
-            <a:solidFill>
-              <a:srgbClr val="08A6A6"/>
-            </a:solidFill>
-            <a:prstDash val="solid"/>
-          </a:ln>
-        </p:spPr>
-      </p:sp>
-      <p:sp>
-        <p:nvSpPr>
-          <p:cNvPr id="11" name="Text 9"/>
-          <p:cNvSpPr txBox="1"/>
-          <p:nvPr/>
-        </p:nvSpPr>
-        <p:spPr>
-          <a:xfrm>
-            <a:off x="6537960" y="2011680"/>
-            <a:ext cx="4754880" cy="365760"/>
-          </a:xfrm>
-          <a:prstGeom prst="rect">
-            <a:avLst/>
-          </a:prstGeom>
-          <a:noFill/>
-          <a:ln/>
-        </p:spPr>
-        <p:txBody>
-          <a:bodyPr wrap="square" lIns="0" tIns="0" rIns="0" bIns="0" rtlCol="0" anchor="ctr"/>
-          <a:lstStyle/>
-          <a:p>
-            <a:pPr indent="0" marL="0">
-              <a:buNone/>
-            </a:pPr>
-            <a:r>
-              <a:rPr lang="en-US" sz="1600" b="1" dirty="0">
-                <a:solidFill>
-                  <a:srgbClr val="08A6A6"/>
-                </a:solidFill>
-                <a:latin typeface="IBM Plex Sans" pitchFamily="34" charset="0"/>
-                <a:ea typeface="IBM Plex Sans" pitchFamily="34" charset="-122"/>
-                <a:cs typeface="IBM Plex Sans" pitchFamily="34" charset="-120"/>
-              </a:rPr>
-              <a:t>Who did what</a:t>
+              <a:t>Predict on paper first, then look down and test it.</a:t>
             </a:r>
             <a:endParaRPr lang="en-US" sz="1600" dirty="0"/>
-          </a:p>
-        </p:txBody>
-      </p:sp>
-      <p:sp>
-        <p:nvSpPr>
-          <p:cNvPr id="12" name="Text 10"/>
-          <p:cNvSpPr txBox="1"/>
-          <p:nvPr/>
-        </p:nvSpPr>
-        <p:spPr>
-          <a:xfrm>
-            <a:off x="6537960" y="2395728"/>
-            <a:ext cx="4754880" cy="1005840"/>
-          </a:xfrm>
-          <a:prstGeom prst="rect">
-            <a:avLst/>
-          </a:prstGeom>
-          <a:noFill/>
-          <a:ln/>
-        </p:spPr>
-        <p:txBody>
-          <a:bodyPr wrap="square" lIns="0" tIns="0" rIns="0" bIns="0" rtlCol="0" anchor="t"/>
-          <a:lstStyle/>
-          <a:p>
-            <a:pPr indent="0" marL="0">
-              <a:lnSpc>
-                <a:spcPct val="120000"/>
-              </a:lnSpc>
-              <a:buNone/>
-            </a:pPr>
-            <a:r>
-              <a:rPr lang="en-US" sz="1300" dirty="0">
-                <a:solidFill>
-                  <a:srgbClr val="667085"/>
-                </a:solidFill>
-                <a:latin typeface="IBM Plex Sans" pitchFamily="34" charset="0"/>
-                <a:ea typeface="IBM Plex Sans" pitchFamily="34" charset="-122"/>
-                <a:cs typeface="IBM Plex Sans" pitchFamily="34" charset="-120"/>
-              </a:rPr>
-              <a:t>Operating systems keep logs of who signed in, and what they opened. It's how a school can find out who deleted a shared file.</a:t>
-            </a:r>
-            <a:endParaRPr lang="en-US" sz="1300" dirty="0"/>
-          </a:p>
-        </p:txBody>
-      </p:sp>
-      <p:sp>
-        <p:nvSpPr>
-          <p:cNvPr id="13" name="Shape 11"/>
-          <p:cNvSpPr/>
-          <p:nvPr/>
-        </p:nvSpPr>
-        <p:spPr>
-          <a:xfrm>
-            <a:off x="502920" y="3794760"/>
-            <a:ext cx="5394960" cy="1737360"/>
-          </a:xfrm>
-          <a:prstGeom prst="roundRect">
-            <a:avLst>
-              <a:gd name="adj" fmla="val 6316"/>
-            </a:avLst>
-          </a:prstGeom>
-          <a:solidFill>
-            <a:srgbClr val="FFFFFF"/>
-          </a:solidFill>
-          <a:ln w="15875">
-            <a:solidFill>
-              <a:srgbClr val="2D63FF"/>
-            </a:solidFill>
-            <a:prstDash val="solid"/>
-          </a:ln>
-        </p:spPr>
-      </p:sp>
-      <p:sp>
-        <p:nvSpPr>
-          <p:cNvPr id="14" name="Text 12"/>
-          <p:cNvSpPr txBox="1"/>
-          <p:nvPr/>
-        </p:nvSpPr>
-        <p:spPr>
-          <a:xfrm>
-            <a:off x="822960" y="3977640"/>
-            <a:ext cx="4754880" cy="365760"/>
-          </a:xfrm>
-          <a:prstGeom prst="rect">
-            <a:avLst/>
-          </a:prstGeom>
-          <a:noFill/>
-          <a:ln/>
-        </p:spPr>
-        <p:txBody>
-          <a:bodyPr wrap="square" lIns="0" tIns="0" rIns="0" bIns="0" rtlCol="0" anchor="ctr"/>
-          <a:lstStyle/>
-          <a:p>
-            <a:pPr indent="0" marL="0">
-              <a:buNone/>
-            </a:pPr>
-            <a:r>
-              <a:rPr lang="en-US" sz="1600" b="1" dirty="0">
-                <a:solidFill>
-                  <a:srgbClr val="2D63FF"/>
-                </a:solidFill>
-                <a:latin typeface="IBM Plex Sans" pitchFamily="34" charset="0"/>
-                <a:ea typeface="IBM Plex Sans" pitchFamily="34" charset="-122"/>
-                <a:cs typeface="IBM Plex Sans" pitchFamily="34" charset="-120"/>
-              </a:rPr>
-              <a:t>The root</a:t>
-            </a:r>
-            <a:endParaRPr lang="en-US" sz="1600" dirty="0"/>
-          </a:p>
-        </p:txBody>
-      </p:sp>
-      <p:sp>
-        <p:nvSpPr>
-          <p:cNvPr id="15" name="Text 13"/>
-          <p:cNvSpPr txBox="1"/>
-          <p:nvPr/>
-        </p:nvSpPr>
-        <p:spPr>
-          <a:xfrm>
-            <a:off x="822960" y="4361688"/>
-            <a:ext cx="4754880" cy="1005840"/>
-          </a:xfrm>
-          <a:prstGeom prst="rect">
-            <a:avLst/>
-          </a:prstGeom>
-          <a:noFill/>
-          <a:ln/>
-        </p:spPr>
-        <p:txBody>
-          <a:bodyPr wrap="square" lIns="0" tIns="0" rIns="0" bIns="0" rtlCol="0" anchor="t"/>
-          <a:lstStyle/>
-          <a:p>
-            <a:pPr indent="0" marL="0">
-              <a:lnSpc>
-                <a:spcPct val="120000"/>
-              </a:lnSpc>
-              <a:buNone/>
-            </a:pPr>
-            <a:r>
-              <a:rPr lang="en-US" sz="1300" dirty="0">
-                <a:solidFill>
-                  <a:srgbClr val="667085"/>
-                </a:solidFill>
-                <a:latin typeface="IBM Plex Sans" pitchFamily="34" charset="0"/>
-                <a:ea typeface="IBM Plex Sans" pitchFamily="34" charset="-122"/>
-                <a:cs typeface="IBM Plex Sans" pitchFamily="34" charset="-120"/>
-              </a:rPr>
-              <a:t>On Windows the top of a drive is C:\; on Linux and macOS it is simply /. Either way, everything else hangs below it.</a:t>
-            </a:r>
-            <a:endParaRPr lang="en-US" sz="1300" dirty="0"/>
-          </a:p>
-        </p:txBody>
-      </p:sp>
-      <p:sp>
-        <p:nvSpPr>
-          <p:cNvPr id="16" name="Shape 14"/>
-          <p:cNvSpPr/>
-          <p:nvPr/>
-        </p:nvSpPr>
-        <p:spPr>
-          <a:xfrm>
-            <a:off x="6217920" y="3794760"/>
-            <a:ext cx="5394960" cy="1737360"/>
-          </a:xfrm>
-          <a:prstGeom prst="roundRect">
-            <a:avLst>
-              <a:gd name="adj" fmla="val 6316"/>
-            </a:avLst>
-          </a:prstGeom>
-          <a:solidFill>
-            <a:srgbClr val="FFFFFF"/>
-          </a:solidFill>
-          <a:ln w="15875">
-            <a:solidFill>
-              <a:srgbClr val="08A6A6"/>
-            </a:solidFill>
-            <a:prstDash val="solid"/>
-          </a:ln>
-        </p:spPr>
-      </p:sp>
-      <p:sp>
-        <p:nvSpPr>
-          <p:cNvPr id="17" name="Text 15"/>
-          <p:cNvSpPr txBox="1"/>
-          <p:nvPr/>
-        </p:nvSpPr>
-        <p:spPr>
-          <a:xfrm>
-            <a:off x="6537960" y="3977640"/>
-            <a:ext cx="4754880" cy="365760"/>
-          </a:xfrm>
-          <a:prstGeom prst="rect">
-            <a:avLst/>
-          </a:prstGeom>
-          <a:noFill/>
-          <a:ln/>
-        </p:spPr>
-        <p:txBody>
-          <a:bodyPr wrap="square" lIns="0" tIns="0" rIns="0" bIns="0" rtlCol="0" anchor="ctr"/>
-          <a:lstStyle/>
-          <a:p>
-            <a:pPr indent="0" marL="0">
-              <a:buNone/>
-            </a:pPr>
-            <a:r>
-              <a:rPr lang="en-US" sz="1600" b="1" dirty="0">
-                <a:solidFill>
-                  <a:srgbClr val="08A6A6"/>
-                </a:solidFill>
-                <a:latin typeface="IBM Plex Sans" pitchFamily="34" charset="0"/>
-                <a:ea typeface="IBM Plex Sans" pitchFamily="34" charset="-122"/>
-                <a:cs typeface="IBM Plex Sans" pitchFamily="34" charset="-120"/>
-              </a:rPr>
-              <a:t>Long names</a:t>
-            </a:r>
-            <a:endParaRPr lang="en-US" sz="1600" dirty="0"/>
-          </a:p>
-        </p:txBody>
-      </p:sp>
-      <p:sp>
-        <p:nvSpPr>
-          <p:cNvPr id="18" name="Text 16"/>
-          <p:cNvSpPr txBox="1"/>
-          <p:nvPr/>
-        </p:nvSpPr>
-        <p:spPr>
-          <a:xfrm>
-            <a:off x="6537960" y="4361688"/>
-            <a:ext cx="4754880" cy="1005840"/>
-          </a:xfrm>
-          <a:prstGeom prst="rect">
-            <a:avLst/>
-          </a:prstGeom>
-          <a:noFill/>
-          <a:ln/>
-        </p:spPr>
-        <p:txBody>
-          <a:bodyPr wrap="square" lIns="0" tIns="0" rIns="0" bIns="0" rtlCol="0" anchor="t"/>
-          <a:lstStyle/>
-          <a:p>
-            <a:pPr indent="0" marL="0">
-              <a:lnSpc>
-                <a:spcPct val="120000"/>
-              </a:lnSpc>
-              <a:buNone/>
-            </a:pPr>
-            <a:r>
-              <a:rPr lang="en-US" sz="1300" dirty="0">
-                <a:solidFill>
-                  <a:srgbClr val="667085"/>
-                </a:solidFill>
-                <a:latin typeface="IBM Plex Sans" pitchFamily="34" charset="0"/>
-                <a:ea typeface="IBM Plex Sans" pitchFamily="34" charset="-122"/>
-                <a:cs typeface="IBM Plex Sans" pitchFamily="34" charset="-120"/>
-              </a:rPr>
-              <a:t>Early systems allowed eight characters and a three-letter extension, which is why old files have names like REPORT01.DOC.</a:t>
-            </a:r>
-            <a:endParaRPr lang="en-US" sz="1300" dirty="0"/>
           </a:p>
         </p:txBody>
       </p:sp>
@@ -3952,7 +4199,7 @@
                 <a:ea typeface="IBM Plex Sans" pitchFamily="34" charset="-122"/>
                 <a:cs typeface="IBM Plex Sans" pitchFamily="34" charset="-120"/>
               </a:rPr>
-              <a:t>Exam practice</a:t>
+              <a:t>Worth knowing</a:t>
             </a:r>
             <a:endParaRPr lang="en-US" sz="3200" dirty="0"/>
           </a:p>
@@ -3991,7 +4238,7 @@
                 <a:ea typeface="IBM Plex Sans" pitchFamily="34" charset="-122"/>
                 <a:cs typeface="IBM Plex Sans" pitchFamily="34" charset="-120"/>
               </a:rPr>
-              <a:t>Devices away. Answer from memory on the worksheet.</a:t>
+              <a:t>The information markers dotted around the room</a:t>
             </a:r>
             <a:endParaRPr lang="en-US" sz="1500" dirty="0"/>
           </a:p>
@@ -4006,11 +4253,11 @@
         <p:spPr>
           <a:xfrm>
             <a:off x="502920" y="1828800"/>
-            <a:ext cx="11155680" cy="1097280"/>
+            <a:ext cx="5394960" cy="1737360"/>
           </a:xfrm>
           <a:prstGeom prst="roundRect">
             <a:avLst>
-              <a:gd name="adj" fmla="val 10000"/>
+              <a:gd name="adj" fmla="val 6316"/>
             </a:avLst>
           </a:prstGeom>
           <a:solidFill>
@@ -4018,7 +4265,7 @@
           </a:solidFill>
           <a:ln w="15875">
             <a:solidFill>
-              <a:srgbClr val="D9DEE7"/>
+              <a:srgbClr val="2D63FF"/>
             </a:solidFill>
             <a:prstDash val="solid"/>
           </a:ln>
@@ -4032,8 +4279,8 @@
         </p:nvSpPr>
         <p:spPr>
           <a:xfrm>
-            <a:off x="914400" y="1938528"/>
-            <a:ext cx="9418320" cy="877824"/>
+            <a:off x="822960" y="2011680"/>
+            <a:ext cx="4754880" cy="365760"/>
           </a:xfrm>
           <a:prstGeom prst="rect">
             <a:avLst/>
@@ -4046,101 +4293,79 @@
           <a:lstStyle/>
           <a:p>
             <a:pPr indent="0" marL="0">
-              <a:lnSpc>
-                <a:spcPct val="118000"/>
-              </a:lnSpc>
-              <a:buNone/>
-            </a:pPr>
-            <a:r>
-              <a:rPr lang="en-US" sz="1700" dirty="0">
-                <a:solidFill>
-                  <a:srgbClr val="101828"/>
+              <a:buNone/>
+            </a:pPr>
+            <a:r>
+              <a:rPr lang="en-US" sz="1600" b="1" dirty="0">
+                <a:solidFill>
+                  <a:srgbClr val="2D63FF"/>
                 </a:solidFill>
                 <a:latin typeface="IBM Plex Sans" pitchFamily="34" charset="0"/>
                 <a:ea typeface="IBM Plex Sans" pitchFamily="34" charset="-122"/>
                 <a:cs typeface="IBM Plex Sans" pitchFamily="34" charset="-120"/>
               </a:rPr>
-              <a:t>State what is meant by user management.</a:t>
-            </a:r>
-            <a:endParaRPr lang="en-US" sz="1700" dirty="0"/>
-          </a:p>
-        </p:txBody>
-      </p:sp>
-      <p:sp>
-        <p:nvSpPr>
-          <p:cNvPr id="9" name="Shape 7"/>
+              <a:t>Least privilege</a:t>
+            </a:r>
+            <a:endParaRPr lang="en-US" sz="1600" dirty="0"/>
+          </a:p>
+        </p:txBody>
+      </p:sp>
+      <p:sp>
+        <p:nvSpPr>
+          <p:cNvPr id="9" name="Text 7"/>
+          <p:cNvSpPr txBox="1"/>
+          <p:nvPr/>
+        </p:nvSpPr>
+        <p:spPr>
+          <a:xfrm>
+            <a:off x="822960" y="2395728"/>
+            <a:ext cx="4754880" cy="1005840"/>
+          </a:xfrm>
+          <a:prstGeom prst="rect">
+            <a:avLst/>
+          </a:prstGeom>
+          <a:noFill/>
+          <a:ln/>
+        </p:spPr>
+        <p:txBody>
+          <a:bodyPr wrap="square" lIns="0" tIns="0" rIns="0" bIns="0" rtlCol="0" anchor="t"/>
+          <a:lstStyle/>
+          <a:p>
+            <a:pPr indent="0" marL="0">
+              <a:lnSpc>
+                <a:spcPct val="120000"/>
+              </a:lnSpc>
+              <a:buNone/>
+            </a:pPr>
+            <a:r>
+              <a:rPr lang="en-US" sz="1300" dirty="0">
+                <a:solidFill>
+                  <a:srgbClr val="667085"/>
+                </a:solidFill>
+                <a:latin typeface="IBM Plex Sans" pitchFamily="34" charset="0"/>
+                <a:ea typeface="IBM Plex Sans" pitchFamily="34" charset="-122"/>
+                <a:cs typeface="IBM Plex Sans" pitchFamily="34" charset="-120"/>
+              </a:rPr>
+              <a:t>Security teams call this the principle of least privilege: give every account the smallest access that still lets the work happen. It limits the damage when an account is stolen.</a:t>
+            </a:r>
+            <a:endParaRPr lang="en-US" sz="1300" dirty="0"/>
+          </a:p>
+        </p:txBody>
+      </p:sp>
+      <p:sp>
+        <p:nvSpPr>
+          <p:cNvPr id="10" name="Shape 8"/>
           <p:cNvSpPr/>
           <p:nvPr/>
         </p:nvSpPr>
         <p:spPr>
           <a:xfrm>
-            <a:off x="10515600" y="2130552"/>
-            <a:ext cx="868680" cy="493776"/>
+            <a:off x="6217920" y="1828800"/>
+            <a:ext cx="5394960" cy="1737360"/>
           </a:xfrm>
           <a:prstGeom prst="roundRect">
             <a:avLst>
-              <a:gd name="adj" fmla="val 18519"/>
-            </a:avLst>
-          </a:prstGeom>
-          <a:solidFill>
-            <a:srgbClr val="EEF2FB"/>
-          </a:solidFill>
-          <a:ln/>
-        </p:spPr>
-      </p:sp>
-      <p:sp>
-        <p:nvSpPr>
-          <p:cNvPr id="10" name="Text 8"/>
-          <p:cNvSpPr txBox="1"/>
-          <p:nvPr/>
-        </p:nvSpPr>
-        <p:spPr>
-          <a:xfrm>
-            <a:off x="10515600" y="2130552"/>
-            <a:ext cx="868680" cy="493776"/>
-          </a:xfrm>
-          <a:prstGeom prst="rect">
-            <a:avLst/>
-          </a:prstGeom>
-          <a:noFill/>
-          <a:ln/>
-        </p:spPr>
-        <p:txBody>
-          <a:bodyPr wrap="square" lIns="0" tIns="0" rIns="0" bIns="0" rtlCol="0" anchor="ctr"/>
-          <a:lstStyle/>
-          <a:p>
-            <a:pPr algn="ctr" indent="0" marL="0">
-              <a:buNone/>
-            </a:pPr>
-            <a:r>
-              <a:rPr lang="en-US" sz="1500" b="1" dirty="0">
-                <a:solidFill>
-                  <a:srgbClr val="2D63FF"/>
-                </a:solidFill>
-                <a:latin typeface="IBM Plex Mono" pitchFamily="34" charset="0"/>
-                <a:ea typeface="IBM Plex Mono" pitchFamily="34" charset="-122"/>
-                <a:cs typeface="IBM Plex Mono" pitchFamily="34" charset="-120"/>
-              </a:rPr>
-              <a:t>[2]</a:t>
-            </a:r>
-            <a:endParaRPr lang="en-US" sz="1500" dirty="0"/>
-          </a:p>
-        </p:txBody>
-      </p:sp>
-      <p:sp>
-        <p:nvSpPr>
-          <p:cNvPr id="11" name="Shape 9"/>
-          <p:cNvSpPr/>
-          <p:nvPr/>
-        </p:nvSpPr>
-        <p:spPr>
-          <a:xfrm>
-            <a:off x="502920" y="3127248"/>
-            <a:ext cx="11155680" cy="1097280"/>
-          </a:xfrm>
-          <a:prstGeom prst="roundRect">
-            <a:avLst>
-              <a:gd name="adj" fmla="val 10000"/>
+              <a:gd name="adj" fmla="val 6316"/>
             </a:avLst>
           </a:prstGeom>
           <a:solidFill>
@@ -4148,7 +4373,7 @@
           </a:solidFill>
           <a:ln w="15875">
             <a:solidFill>
-              <a:srgbClr val="D9DEE7"/>
+              <a:srgbClr val="08A6A6"/>
             </a:solidFill>
             <a:prstDash val="solid"/>
           </a:ln>
@@ -4156,14 +4381,14 @@
       </p:sp>
       <p:sp>
         <p:nvSpPr>
-          <p:cNvPr id="12" name="Text 10"/>
-          <p:cNvSpPr txBox="1"/>
-          <p:nvPr/>
-        </p:nvSpPr>
-        <p:spPr>
-          <a:xfrm>
-            <a:off x="914400" y="3236976"/>
-            <a:ext cx="9418320" cy="877824"/>
+          <p:cNvPr id="11" name="Text 9"/>
+          <p:cNvSpPr txBox="1"/>
+          <p:nvPr/>
+        </p:nvSpPr>
+        <p:spPr>
+          <a:xfrm>
+            <a:off x="6537960" y="2011680"/>
+            <a:ext cx="4754880" cy="365760"/>
           </a:xfrm>
           <a:prstGeom prst="rect">
             <a:avLst/>
@@ -4176,23 +4401,62 @@
           <a:lstStyle/>
           <a:p>
             <a:pPr indent="0" marL="0">
-              <a:lnSpc>
-                <a:spcPct val="118000"/>
-              </a:lnSpc>
-              <a:buNone/>
-            </a:pPr>
-            <a:r>
-              <a:rPr lang="en-US" sz="1700" dirty="0">
-                <a:solidFill>
-                  <a:srgbClr val="101828"/>
+              <a:buNone/>
+            </a:pPr>
+            <a:r>
+              <a:rPr lang="en-US" sz="1600" b="1" dirty="0">
+                <a:solidFill>
+                  <a:srgbClr val="08A6A6"/>
                 </a:solidFill>
                 <a:latin typeface="IBM Plex Sans" pitchFamily="34" charset="0"/>
                 <a:ea typeface="IBM Plex Sans" pitchFamily="34" charset="-122"/>
                 <a:cs typeface="IBM Plex Sans" pitchFamily="34" charset="-120"/>
               </a:rPr>
-              <a:t>Explain why a network manager sets permissions on groups rather than on individual users.</a:t>
-            </a:r>
-            <a:endParaRPr lang="en-US" sz="1700" dirty="0"/>
+              <a:t>Who did what</a:t>
+            </a:r>
+            <a:endParaRPr lang="en-US" sz="1600" dirty="0"/>
+          </a:p>
+        </p:txBody>
+      </p:sp>
+      <p:sp>
+        <p:nvSpPr>
+          <p:cNvPr id="12" name="Text 10"/>
+          <p:cNvSpPr txBox="1"/>
+          <p:nvPr/>
+        </p:nvSpPr>
+        <p:spPr>
+          <a:xfrm>
+            <a:off x="6537960" y="2395728"/>
+            <a:ext cx="4754880" cy="1005840"/>
+          </a:xfrm>
+          <a:prstGeom prst="rect">
+            <a:avLst/>
+          </a:prstGeom>
+          <a:noFill/>
+          <a:ln/>
+        </p:spPr>
+        <p:txBody>
+          <a:bodyPr wrap="square" lIns="0" tIns="0" rIns="0" bIns="0" rtlCol="0" anchor="t"/>
+          <a:lstStyle/>
+          <a:p>
+            <a:pPr indent="0" marL="0">
+              <a:lnSpc>
+                <a:spcPct val="120000"/>
+              </a:lnSpc>
+              <a:buNone/>
+            </a:pPr>
+            <a:r>
+              <a:rPr lang="en-US" sz="1300" dirty="0">
+                <a:solidFill>
+                  <a:srgbClr val="667085"/>
+                </a:solidFill>
+                <a:latin typeface="IBM Plex Sans" pitchFamily="34" charset="0"/>
+                <a:ea typeface="IBM Plex Sans" pitchFamily="34" charset="-122"/>
+                <a:cs typeface="IBM Plex Sans" pitchFamily="34" charset="-120"/>
+              </a:rPr>
+              <a:t>Operating systems keep logs of who signed in, and what they opened. It's how a school can find out who deleted a shared file.</a:t>
+            </a:r>
+            <a:endParaRPr lang="en-US" sz="1300" dirty="0"/>
           </a:p>
         </p:txBody>
       </p:sp>
@@ -4204,73 +4468,12 @@
         </p:nvSpPr>
         <p:spPr>
           <a:xfrm>
-            <a:off x="10515600" y="3429000"/>
-            <a:ext cx="868680" cy="493776"/>
+            <a:off x="502920" y="3794760"/>
+            <a:ext cx="5394960" cy="1737360"/>
           </a:xfrm>
           <a:prstGeom prst="roundRect">
             <a:avLst>
-              <a:gd name="adj" fmla="val 18519"/>
-            </a:avLst>
-          </a:prstGeom>
-          <a:solidFill>
-            <a:srgbClr val="EEF2FB"/>
-          </a:solidFill>
-          <a:ln/>
-        </p:spPr>
-      </p:sp>
-      <p:sp>
-        <p:nvSpPr>
-          <p:cNvPr id="14" name="Text 12"/>
-          <p:cNvSpPr txBox="1"/>
-          <p:nvPr/>
-        </p:nvSpPr>
-        <p:spPr>
-          <a:xfrm>
-            <a:off x="10515600" y="3429000"/>
-            <a:ext cx="868680" cy="493776"/>
-          </a:xfrm>
-          <a:prstGeom prst="rect">
-            <a:avLst/>
-          </a:prstGeom>
-          <a:noFill/>
-          <a:ln/>
-        </p:spPr>
-        <p:txBody>
-          <a:bodyPr wrap="square" lIns="0" tIns="0" rIns="0" bIns="0" rtlCol="0" anchor="ctr"/>
-          <a:lstStyle/>
-          <a:p>
-            <a:pPr algn="ctr" indent="0" marL="0">
-              <a:buNone/>
-            </a:pPr>
-            <a:r>
-              <a:rPr lang="en-US" sz="1500" b="1" dirty="0">
-                <a:solidFill>
-                  <a:srgbClr val="2D63FF"/>
-                </a:solidFill>
-                <a:latin typeface="IBM Plex Mono" pitchFamily="34" charset="0"/>
-                <a:ea typeface="IBM Plex Mono" pitchFamily="34" charset="-122"/>
-                <a:cs typeface="IBM Plex Mono" pitchFamily="34" charset="-120"/>
-              </a:rPr>
-              <a:t>[3]</a:t>
-            </a:r>
-            <a:endParaRPr lang="en-US" sz="1500" dirty="0"/>
-          </a:p>
-        </p:txBody>
-      </p:sp>
-      <p:sp>
-        <p:nvSpPr>
-          <p:cNvPr id="15" name="Shape 13"/>
-          <p:cNvSpPr/>
-          <p:nvPr/>
-        </p:nvSpPr>
-        <p:spPr>
-          <a:xfrm>
-            <a:off x="502920" y="4425696"/>
-            <a:ext cx="11155680" cy="1097280"/>
-          </a:xfrm>
-          <a:prstGeom prst="roundRect">
-            <a:avLst>
-              <a:gd name="adj" fmla="val 10000"/>
+              <a:gd name="adj" fmla="val 6316"/>
             </a:avLst>
           </a:prstGeom>
           <a:solidFill>
@@ -4278,7 +4481,7 @@
           </a:solidFill>
           <a:ln w="15875">
             <a:solidFill>
-              <a:srgbClr val="D9DEE7"/>
+              <a:srgbClr val="2D63FF"/>
             </a:solidFill>
             <a:prstDash val="solid"/>
           </a:ln>
@@ -4286,14 +4489,14 @@
       </p:sp>
       <p:sp>
         <p:nvSpPr>
-          <p:cNvPr id="16" name="Text 14"/>
-          <p:cNvSpPr txBox="1"/>
-          <p:nvPr/>
-        </p:nvSpPr>
-        <p:spPr>
-          <a:xfrm>
-            <a:off x="914400" y="4535424"/>
-            <a:ext cx="9418320" cy="877824"/>
+          <p:cNvPr id="14" name="Text 12"/>
+          <p:cNvSpPr txBox="1"/>
+          <p:nvPr/>
+        </p:nvSpPr>
+        <p:spPr>
+          <a:xfrm>
+            <a:off x="822960" y="3977640"/>
+            <a:ext cx="4754880" cy="365760"/>
           </a:xfrm>
           <a:prstGeom prst="rect">
             <a:avLst/>
@@ -4306,47 +4509,130 @@
           <a:lstStyle/>
           <a:p>
             <a:pPr indent="0" marL="0">
-              <a:lnSpc>
-                <a:spcPct val="118000"/>
-              </a:lnSpc>
-              <a:buNone/>
-            </a:pPr>
-            <a:r>
-              <a:rPr lang="en-US" sz="1700" dirty="0">
-                <a:solidFill>
-                  <a:srgbClr val="101828"/>
+              <a:buNone/>
+            </a:pPr>
+            <a:r>
+              <a:rPr lang="en-US" sz="1600" b="1" dirty="0">
+                <a:solidFill>
+                  <a:srgbClr val="2D63FF"/>
                 </a:solidFill>
                 <a:latin typeface="IBM Plex Sans" pitchFamily="34" charset="0"/>
                 <a:ea typeface="IBM Plex Sans" pitchFamily="34" charset="-122"/>
                 <a:cs typeface="IBM Plex Sans" pitchFamily="34" charset="-120"/>
               </a:rPr>
-              <a:t>Describe three file management tasks carried out by an operating system.</a:t>
-            </a:r>
-            <a:endParaRPr lang="en-US" sz="1700" dirty="0"/>
-          </a:p>
-        </p:txBody>
-      </p:sp>
-      <p:sp>
-        <p:nvSpPr>
-          <p:cNvPr id="17" name="Shape 15"/>
+              <a:t>The root</a:t>
+            </a:r>
+            <a:endParaRPr lang="en-US" sz="1600" dirty="0"/>
+          </a:p>
+        </p:txBody>
+      </p:sp>
+      <p:sp>
+        <p:nvSpPr>
+          <p:cNvPr id="15" name="Text 13"/>
+          <p:cNvSpPr txBox="1"/>
+          <p:nvPr/>
+        </p:nvSpPr>
+        <p:spPr>
+          <a:xfrm>
+            <a:off x="822960" y="4361688"/>
+            <a:ext cx="4754880" cy="1005840"/>
+          </a:xfrm>
+          <a:prstGeom prst="rect">
+            <a:avLst/>
+          </a:prstGeom>
+          <a:noFill/>
+          <a:ln/>
+        </p:spPr>
+        <p:txBody>
+          <a:bodyPr wrap="square" lIns="0" tIns="0" rIns="0" bIns="0" rtlCol="0" anchor="t"/>
+          <a:lstStyle/>
+          <a:p>
+            <a:pPr indent="0" marL="0">
+              <a:lnSpc>
+                <a:spcPct val="120000"/>
+              </a:lnSpc>
+              <a:buNone/>
+            </a:pPr>
+            <a:r>
+              <a:rPr lang="en-US" sz="1300" dirty="0">
+                <a:solidFill>
+                  <a:srgbClr val="667085"/>
+                </a:solidFill>
+                <a:latin typeface="IBM Plex Sans" pitchFamily="34" charset="0"/>
+                <a:ea typeface="IBM Plex Sans" pitchFamily="34" charset="-122"/>
+                <a:cs typeface="IBM Plex Sans" pitchFamily="34" charset="-120"/>
+              </a:rPr>
+              <a:t>On Windows the top of a drive is C:\; on Linux and macOS it is simply /. Either way, everything else hangs below it.</a:t>
+            </a:r>
+            <a:endParaRPr lang="en-US" sz="1300" dirty="0"/>
+          </a:p>
+        </p:txBody>
+      </p:sp>
+      <p:sp>
+        <p:nvSpPr>
+          <p:cNvPr id="16" name="Shape 14"/>
           <p:cNvSpPr/>
           <p:nvPr/>
         </p:nvSpPr>
         <p:spPr>
           <a:xfrm>
-            <a:off x="10515600" y="4727448"/>
-            <a:ext cx="868680" cy="493776"/>
+            <a:off x="6217920" y="3794760"/>
+            <a:ext cx="5394960" cy="1737360"/>
           </a:xfrm>
           <a:prstGeom prst="roundRect">
             <a:avLst>
-              <a:gd name="adj" fmla="val 18519"/>
+              <a:gd name="adj" fmla="val 6316"/>
             </a:avLst>
           </a:prstGeom>
           <a:solidFill>
-            <a:srgbClr val="EEF2FB"/>
+            <a:srgbClr val="FFFFFF"/>
           </a:solidFill>
-          <a:ln/>
-        </p:spPr>
+          <a:ln w="15875">
+            <a:solidFill>
+              <a:srgbClr val="08A6A6"/>
+            </a:solidFill>
+            <a:prstDash val="solid"/>
+          </a:ln>
+        </p:spPr>
+      </p:sp>
+      <p:sp>
+        <p:nvSpPr>
+          <p:cNvPr id="17" name="Text 15"/>
+          <p:cNvSpPr txBox="1"/>
+          <p:nvPr/>
+        </p:nvSpPr>
+        <p:spPr>
+          <a:xfrm>
+            <a:off x="6537960" y="3977640"/>
+            <a:ext cx="4754880" cy="365760"/>
+          </a:xfrm>
+          <a:prstGeom prst="rect">
+            <a:avLst/>
+          </a:prstGeom>
+          <a:noFill/>
+          <a:ln/>
+        </p:spPr>
+        <p:txBody>
+          <a:bodyPr wrap="square" lIns="0" tIns="0" rIns="0" bIns="0" rtlCol="0" anchor="ctr"/>
+          <a:lstStyle/>
+          <a:p>
+            <a:pPr indent="0" marL="0">
+              <a:buNone/>
+            </a:pPr>
+            <a:r>
+              <a:rPr lang="en-US" sz="1600" b="1" dirty="0">
+                <a:solidFill>
+                  <a:srgbClr val="08A6A6"/>
+                </a:solidFill>
+                <a:latin typeface="IBM Plex Sans" pitchFamily="34" charset="0"/>
+                <a:ea typeface="IBM Plex Sans" pitchFamily="34" charset="-122"/>
+                <a:cs typeface="IBM Plex Sans" pitchFamily="34" charset="-120"/>
+              </a:rPr>
+              <a:t>Long names</a:t>
+            </a:r>
+            <a:endParaRPr lang="en-US" sz="1600" dirty="0"/>
+          </a:p>
+        </p:txBody>
       </p:sp>
       <p:sp>
         <p:nvSpPr>
@@ -4356,34 +4642,37 @@
         </p:nvSpPr>
         <p:spPr>
           <a:xfrm>
-            <a:off x="10515600" y="4727448"/>
-            <a:ext cx="868680" cy="493776"/>
-          </a:xfrm>
-          <a:prstGeom prst="rect">
-            <a:avLst/>
-          </a:prstGeom>
-          <a:noFill/>
-          <a:ln/>
-        </p:spPr>
-        <p:txBody>
-          <a:bodyPr wrap="square" lIns="0" tIns="0" rIns="0" bIns="0" rtlCol="0" anchor="ctr"/>
-          <a:lstStyle/>
-          <a:p>
-            <a:pPr algn="ctr" indent="0" marL="0">
-              <a:buNone/>
-            </a:pPr>
-            <a:r>
-              <a:rPr lang="en-US" sz="1500" b="1" dirty="0">
-                <a:solidFill>
-                  <a:srgbClr val="2D63FF"/>
-                </a:solidFill>
-                <a:latin typeface="IBM Plex Mono" pitchFamily="34" charset="0"/>
-                <a:ea typeface="IBM Plex Mono" pitchFamily="34" charset="-122"/>
-                <a:cs typeface="IBM Plex Mono" pitchFamily="34" charset="-120"/>
-              </a:rPr>
-              <a:t>[6]</a:t>
-            </a:r>
-            <a:endParaRPr lang="en-US" sz="1500" dirty="0"/>
+            <a:off x="6537960" y="4361688"/>
+            <a:ext cx="4754880" cy="1005840"/>
+          </a:xfrm>
+          <a:prstGeom prst="rect">
+            <a:avLst/>
+          </a:prstGeom>
+          <a:noFill/>
+          <a:ln/>
+        </p:spPr>
+        <p:txBody>
+          <a:bodyPr wrap="square" lIns="0" tIns="0" rIns="0" bIns="0" rtlCol="0" anchor="t"/>
+          <a:lstStyle/>
+          <a:p>
+            <a:pPr indent="0" marL="0">
+              <a:lnSpc>
+                <a:spcPct val="120000"/>
+              </a:lnSpc>
+              <a:buNone/>
+            </a:pPr>
+            <a:r>
+              <a:rPr lang="en-US" sz="1300" dirty="0">
+                <a:solidFill>
+                  <a:srgbClr val="667085"/>
+                </a:solidFill>
+                <a:latin typeface="IBM Plex Sans" pitchFamily="34" charset="0"/>
+                <a:ea typeface="IBM Plex Sans" pitchFamily="34" charset="-122"/>
+                <a:cs typeface="IBM Plex Sans" pitchFamily="34" charset="-120"/>
+              </a:rPr>
+              <a:t>Early systems allowed eight characters and a three-letter extension, which is why old files have names like REPORT01.DOC.</a:t>
+            </a:r>
+            <a:endParaRPr lang="en-US" sz="1300" dirty="0"/>
           </a:p>
         </p:txBody>
       </p:sp>
@@ -4398,6 +4687,604 @@
 <file path=ppt/slides/slide14.xml><?xml version="1.0" encoding="utf-8"?>
 <p:sld xmlns:a="http://schemas.openxmlformats.org/drawingml/2006/main" xmlns:r="http://schemas.openxmlformats.org/officeDocument/2006/relationships" xmlns:p="http://schemas.openxmlformats.org/presentationml/2006/main">
   <p:cSld name="Slide 14">
+    <p:bg>
+      <p:bgPr>
+        <a:solidFill>
+          <a:srgbClr val="F7F7F4"/>
+        </a:solidFill>
+      </p:bgPr>
+    </p:bg>
+    <p:spTree>
+      <p:nvGrpSpPr>
+        <p:cNvPr id="1" name=""/>
+        <p:cNvGrpSpPr/>
+        <p:nvPr/>
+      </p:nvGrpSpPr>
+      <p:grpSpPr>
+        <a:xfrm>
+          <a:off x="0" y="0"/>
+          <a:ext cx="0" cy="0"/>
+          <a:chOff x="0" y="0"/>
+          <a:chExt cx="0" cy="0"/>
+        </a:xfrm>
+      </p:grpSpPr>
+      <p:sp>
+        <p:nvSpPr>
+          <p:cNvPr id="2" name="Shape 0"/>
+          <p:cNvSpPr/>
+          <p:nvPr/>
+        </p:nvSpPr>
+        <p:spPr>
+          <a:xfrm>
+            <a:off x="0" y="0"/>
+            <a:ext cx="12188952" cy="82296"/>
+          </a:xfrm>
+          <a:prstGeom prst="rect">
+            <a:avLst/>
+          </a:prstGeom>
+          <a:solidFill>
+            <a:srgbClr val="2D63FF"/>
+          </a:solidFill>
+          <a:ln/>
+        </p:spPr>
+      </p:sp>
+      <p:sp>
+        <p:nvSpPr>
+          <p:cNvPr id="3" name="Text 1"/>
+          <p:cNvSpPr txBox="1"/>
+          <p:nvPr/>
+        </p:nvSpPr>
+        <p:spPr>
+          <a:xfrm>
+            <a:off x="502920" y="6236208"/>
+            <a:ext cx="7772400" cy="365760"/>
+          </a:xfrm>
+          <a:prstGeom prst="rect">
+            <a:avLst/>
+          </a:prstGeom>
+          <a:noFill/>
+          <a:ln/>
+        </p:spPr>
+        <p:txBody>
+          <a:bodyPr wrap="square" lIns="0" tIns="0" rIns="0" bIns="0" rtlCol="0" anchor="ctr"/>
+          <a:lstStyle/>
+          <a:p>
+            <a:pPr indent="0" marL="0">
+              <a:buNone/>
+            </a:pPr>
+            <a:r>
+              <a:rPr lang="en-US" sz="1100" dirty="0">
+                <a:solidFill>
+                  <a:srgbClr val="667085"/>
+                </a:solidFill>
+                <a:latin typeface="IBM Plex Mono" pitchFamily="34" charset="0"/>
+                <a:ea typeface="IBM Plex Mono" pitchFamily="34" charset="-122"/>
+                <a:cs typeface="IBM Plex Mono" pitchFamily="34" charset="-120"/>
+              </a:rPr>
+              <a:t>1.5 Systems software  |  Lesson 3</a:t>
+            </a:r>
+            <a:endParaRPr lang="en-US" sz="1100" dirty="0"/>
+          </a:p>
+        </p:txBody>
+      </p:sp>
+      <p:sp>
+        <p:nvSpPr>
+          <p:cNvPr id="4" name="Text 2"/>
+          <p:cNvSpPr txBox="1"/>
+          <p:nvPr/>
+        </p:nvSpPr>
+        <p:spPr>
+          <a:xfrm>
+            <a:off x="9326880" y="6236208"/>
+            <a:ext cx="2377440" cy="365760"/>
+          </a:xfrm>
+          <a:prstGeom prst="rect">
+            <a:avLst/>
+          </a:prstGeom>
+          <a:noFill/>
+          <a:ln/>
+        </p:spPr>
+        <p:txBody>
+          <a:bodyPr wrap="square" lIns="0" tIns="0" rIns="0" bIns="0" rtlCol="0" anchor="ctr"/>
+          <a:lstStyle/>
+          <a:p>
+            <a:pPr algn="r" indent="0" marL="0">
+              <a:buNone/>
+            </a:pPr>
+            <a:r>
+              <a:rPr lang="en-US" sz="1100" dirty="0">
+                <a:solidFill>
+                  <a:srgbClr val="667085"/>
+                </a:solidFill>
+                <a:latin typeface="IBM Plex Mono" pitchFamily="34" charset="0"/>
+                <a:ea typeface="IBM Plex Mono" pitchFamily="34" charset="-122"/>
+                <a:cs typeface="IBM Plex Mono" pitchFamily="34" charset="-120"/>
+              </a:rPr>
+              <a:t>Revise 360</a:t>
+            </a:r>
+            <a:endParaRPr lang="en-US" sz="1100" dirty="0"/>
+          </a:p>
+        </p:txBody>
+      </p:sp>
+      <p:sp>
+        <p:nvSpPr>
+          <p:cNvPr id="5" name="Text 3"/>
+          <p:cNvSpPr txBox="1"/>
+          <p:nvPr/>
+        </p:nvSpPr>
+        <p:spPr>
+          <a:xfrm>
+            <a:off x="502920" y="411480"/>
+            <a:ext cx="11155680" cy="777240"/>
+          </a:xfrm>
+          <a:prstGeom prst="rect">
+            <a:avLst/>
+          </a:prstGeom>
+          <a:noFill/>
+          <a:ln/>
+        </p:spPr>
+        <p:txBody>
+          <a:bodyPr wrap="square" lIns="0" tIns="0" rIns="0" bIns="0" rtlCol="0" anchor="ctr"/>
+          <a:lstStyle/>
+          <a:p>
+            <a:pPr indent="0" marL="0">
+              <a:buNone/>
+            </a:pPr>
+            <a:r>
+              <a:rPr lang="en-US" sz="3200" b="1" dirty="0">
+                <a:solidFill>
+                  <a:srgbClr val="101828"/>
+                </a:solidFill>
+                <a:latin typeface="IBM Plex Sans" pitchFamily="34" charset="0"/>
+                <a:ea typeface="IBM Plex Sans" pitchFamily="34" charset="-122"/>
+                <a:cs typeface="IBM Plex Sans" pitchFamily="34" charset="-120"/>
+              </a:rPr>
+              <a:t>Exam practice</a:t>
+            </a:r>
+            <a:endParaRPr lang="en-US" sz="3200" dirty="0"/>
+          </a:p>
+        </p:txBody>
+      </p:sp>
+      <p:sp>
+        <p:nvSpPr>
+          <p:cNvPr id="6" name="Text 4"/>
+          <p:cNvSpPr txBox="1"/>
+          <p:nvPr/>
+        </p:nvSpPr>
+        <p:spPr>
+          <a:xfrm>
+            <a:off x="502920" y="1170432"/>
+            <a:ext cx="11155680" cy="411480"/>
+          </a:xfrm>
+          <a:prstGeom prst="rect">
+            <a:avLst/>
+          </a:prstGeom>
+          <a:noFill/>
+          <a:ln/>
+        </p:spPr>
+        <p:txBody>
+          <a:bodyPr wrap="square" lIns="0" tIns="0" rIns="0" bIns="0" rtlCol="0" anchor="ctr"/>
+          <a:lstStyle/>
+          <a:p>
+            <a:pPr indent="0" marL="0">
+              <a:buNone/>
+            </a:pPr>
+            <a:r>
+              <a:rPr lang="en-US" sz="1500" dirty="0">
+                <a:solidFill>
+                  <a:srgbClr val="667085"/>
+                </a:solidFill>
+                <a:latin typeface="IBM Plex Sans" pitchFamily="34" charset="0"/>
+                <a:ea typeface="IBM Plex Sans" pitchFamily="34" charset="-122"/>
+                <a:cs typeface="IBM Plex Sans" pitchFamily="34" charset="-120"/>
+              </a:rPr>
+              <a:t>Devices away. Answer from memory on the worksheet.</a:t>
+            </a:r>
+            <a:endParaRPr lang="en-US" sz="1500" dirty="0"/>
+          </a:p>
+        </p:txBody>
+      </p:sp>
+      <p:sp>
+        <p:nvSpPr>
+          <p:cNvPr id="7" name="Shape 5"/>
+          <p:cNvSpPr/>
+          <p:nvPr/>
+        </p:nvSpPr>
+        <p:spPr>
+          <a:xfrm>
+            <a:off x="502920" y="1828800"/>
+            <a:ext cx="11155680" cy="1097280"/>
+          </a:xfrm>
+          <a:prstGeom prst="roundRect">
+            <a:avLst>
+              <a:gd name="adj" fmla="val 10000"/>
+            </a:avLst>
+          </a:prstGeom>
+          <a:solidFill>
+            <a:srgbClr val="FFFFFF"/>
+          </a:solidFill>
+          <a:ln w="15875">
+            <a:solidFill>
+              <a:srgbClr val="D9DEE7"/>
+            </a:solidFill>
+            <a:prstDash val="solid"/>
+          </a:ln>
+        </p:spPr>
+      </p:sp>
+      <p:sp>
+        <p:nvSpPr>
+          <p:cNvPr id="8" name="Text 6"/>
+          <p:cNvSpPr txBox="1"/>
+          <p:nvPr/>
+        </p:nvSpPr>
+        <p:spPr>
+          <a:xfrm>
+            <a:off x="914400" y="1938528"/>
+            <a:ext cx="9418320" cy="877824"/>
+          </a:xfrm>
+          <a:prstGeom prst="rect">
+            <a:avLst/>
+          </a:prstGeom>
+          <a:noFill/>
+          <a:ln/>
+        </p:spPr>
+        <p:txBody>
+          <a:bodyPr wrap="square" lIns="0" tIns="0" rIns="0" bIns="0" rtlCol="0" anchor="ctr"/>
+          <a:lstStyle/>
+          <a:p>
+            <a:pPr indent="0" marL="0">
+              <a:lnSpc>
+                <a:spcPct val="118000"/>
+              </a:lnSpc>
+              <a:buNone/>
+            </a:pPr>
+            <a:r>
+              <a:rPr lang="en-US" sz="1700" dirty="0">
+                <a:solidFill>
+                  <a:srgbClr val="101828"/>
+                </a:solidFill>
+                <a:latin typeface="IBM Plex Sans" pitchFamily="34" charset="0"/>
+                <a:ea typeface="IBM Plex Sans" pitchFamily="34" charset="-122"/>
+                <a:cs typeface="IBM Plex Sans" pitchFamily="34" charset="-120"/>
+              </a:rPr>
+              <a:t>State what is meant by user management.</a:t>
+            </a:r>
+            <a:endParaRPr lang="en-US" sz="1700" dirty="0"/>
+          </a:p>
+        </p:txBody>
+      </p:sp>
+      <p:sp>
+        <p:nvSpPr>
+          <p:cNvPr id="9" name="Shape 7"/>
+          <p:cNvSpPr/>
+          <p:nvPr/>
+        </p:nvSpPr>
+        <p:spPr>
+          <a:xfrm>
+            <a:off x="10515600" y="2130552"/>
+            <a:ext cx="868680" cy="493776"/>
+          </a:xfrm>
+          <a:prstGeom prst="roundRect">
+            <a:avLst>
+              <a:gd name="adj" fmla="val 18519"/>
+            </a:avLst>
+          </a:prstGeom>
+          <a:solidFill>
+            <a:srgbClr val="EEF2FB"/>
+          </a:solidFill>
+          <a:ln/>
+        </p:spPr>
+      </p:sp>
+      <p:sp>
+        <p:nvSpPr>
+          <p:cNvPr id="10" name="Text 8"/>
+          <p:cNvSpPr txBox="1"/>
+          <p:nvPr/>
+        </p:nvSpPr>
+        <p:spPr>
+          <a:xfrm>
+            <a:off x="10515600" y="2130552"/>
+            <a:ext cx="868680" cy="493776"/>
+          </a:xfrm>
+          <a:prstGeom prst="rect">
+            <a:avLst/>
+          </a:prstGeom>
+          <a:noFill/>
+          <a:ln/>
+        </p:spPr>
+        <p:txBody>
+          <a:bodyPr wrap="square" lIns="0" tIns="0" rIns="0" bIns="0" rtlCol="0" anchor="ctr"/>
+          <a:lstStyle/>
+          <a:p>
+            <a:pPr algn="ctr" indent="0" marL="0">
+              <a:buNone/>
+            </a:pPr>
+            <a:r>
+              <a:rPr lang="en-US" sz="1500" b="1" dirty="0">
+                <a:solidFill>
+                  <a:srgbClr val="2D63FF"/>
+                </a:solidFill>
+                <a:latin typeface="IBM Plex Mono" pitchFamily="34" charset="0"/>
+                <a:ea typeface="IBM Plex Mono" pitchFamily="34" charset="-122"/>
+                <a:cs typeface="IBM Plex Mono" pitchFamily="34" charset="-120"/>
+              </a:rPr>
+              <a:t>[2]</a:t>
+            </a:r>
+            <a:endParaRPr lang="en-US" sz="1500" dirty="0"/>
+          </a:p>
+        </p:txBody>
+      </p:sp>
+      <p:sp>
+        <p:nvSpPr>
+          <p:cNvPr id="11" name="Shape 9"/>
+          <p:cNvSpPr/>
+          <p:nvPr/>
+        </p:nvSpPr>
+        <p:spPr>
+          <a:xfrm>
+            <a:off x="502920" y="3127248"/>
+            <a:ext cx="11155680" cy="1097280"/>
+          </a:xfrm>
+          <a:prstGeom prst="roundRect">
+            <a:avLst>
+              <a:gd name="adj" fmla="val 10000"/>
+            </a:avLst>
+          </a:prstGeom>
+          <a:solidFill>
+            <a:srgbClr val="FFFFFF"/>
+          </a:solidFill>
+          <a:ln w="15875">
+            <a:solidFill>
+              <a:srgbClr val="D9DEE7"/>
+            </a:solidFill>
+            <a:prstDash val="solid"/>
+          </a:ln>
+        </p:spPr>
+      </p:sp>
+      <p:sp>
+        <p:nvSpPr>
+          <p:cNvPr id="12" name="Text 10"/>
+          <p:cNvSpPr txBox="1"/>
+          <p:nvPr/>
+        </p:nvSpPr>
+        <p:spPr>
+          <a:xfrm>
+            <a:off x="914400" y="3236976"/>
+            <a:ext cx="9418320" cy="877824"/>
+          </a:xfrm>
+          <a:prstGeom prst="rect">
+            <a:avLst/>
+          </a:prstGeom>
+          <a:noFill/>
+          <a:ln/>
+        </p:spPr>
+        <p:txBody>
+          <a:bodyPr wrap="square" lIns="0" tIns="0" rIns="0" bIns="0" rtlCol="0" anchor="ctr"/>
+          <a:lstStyle/>
+          <a:p>
+            <a:pPr indent="0" marL="0">
+              <a:lnSpc>
+                <a:spcPct val="118000"/>
+              </a:lnSpc>
+              <a:buNone/>
+            </a:pPr>
+            <a:r>
+              <a:rPr lang="en-US" sz="1700" dirty="0">
+                <a:solidFill>
+                  <a:srgbClr val="101828"/>
+                </a:solidFill>
+                <a:latin typeface="IBM Plex Sans" pitchFamily="34" charset="0"/>
+                <a:ea typeface="IBM Plex Sans" pitchFamily="34" charset="-122"/>
+                <a:cs typeface="IBM Plex Sans" pitchFamily="34" charset="-120"/>
+              </a:rPr>
+              <a:t>Explain why a network manager sets permissions on groups rather than on individual users.</a:t>
+            </a:r>
+            <a:endParaRPr lang="en-US" sz="1700" dirty="0"/>
+          </a:p>
+        </p:txBody>
+      </p:sp>
+      <p:sp>
+        <p:nvSpPr>
+          <p:cNvPr id="13" name="Shape 11"/>
+          <p:cNvSpPr/>
+          <p:nvPr/>
+        </p:nvSpPr>
+        <p:spPr>
+          <a:xfrm>
+            <a:off x="10515600" y="3429000"/>
+            <a:ext cx="868680" cy="493776"/>
+          </a:xfrm>
+          <a:prstGeom prst="roundRect">
+            <a:avLst>
+              <a:gd name="adj" fmla="val 18519"/>
+            </a:avLst>
+          </a:prstGeom>
+          <a:solidFill>
+            <a:srgbClr val="EEF2FB"/>
+          </a:solidFill>
+          <a:ln/>
+        </p:spPr>
+      </p:sp>
+      <p:sp>
+        <p:nvSpPr>
+          <p:cNvPr id="14" name="Text 12"/>
+          <p:cNvSpPr txBox="1"/>
+          <p:nvPr/>
+        </p:nvSpPr>
+        <p:spPr>
+          <a:xfrm>
+            <a:off x="10515600" y="3429000"/>
+            <a:ext cx="868680" cy="493776"/>
+          </a:xfrm>
+          <a:prstGeom prst="rect">
+            <a:avLst/>
+          </a:prstGeom>
+          <a:noFill/>
+          <a:ln/>
+        </p:spPr>
+        <p:txBody>
+          <a:bodyPr wrap="square" lIns="0" tIns="0" rIns="0" bIns="0" rtlCol="0" anchor="ctr"/>
+          <a:lstStyle/>
+          <a:p>
+            <a:pPr algn="ctr" indent="0" marL="0">
+              <a:buNone/>
+            </a:pPr>
+            <a:r>
+              <a:rPr lang="en-US" sz="1500" b="1" dirty="0">
+                <a:solidFill>
+                  <a:srgbClr val="2D63FF"/>
+                </a:solidFill>
+                <a:latin typeface="IBM Plex Mono" pitchFamily="34" charset="0"/>
+                <a:ea typeface="IBM Plex Mono" pitchFamily="34" charset="-122"/>
+                <a:cs typeface="IBM Plex Mono" pitchFamily="34" charset="-120"/>
+              </a:rPr>
+              <a:t>[3]</a:t>
+            </a:r>
+            <a:endParaRPr lang="en-US" sz="1500" dirty="0"/>
+          </a:p>
+        </p:txBody>
+      </p:sp>
+      <p:sp>
+        <p:nvSpPr>
+          <p:cNvPr id="15" name="Shape 13"/>
+          <p:cNvSpPr/>
+          <p:nvPr/>
+        </p:nvSpPr>
+        <p:spPr>
+          <a:xfrm>
+            <a:off x="502920" y="4425696"/>
+            <a:ext cx="11155680" cy="1097280"/>
+          </a:xfrm>
+          <a:prstGeom prst="roundRect">
+            <a:avLst>
+              <a:gd name="adj" fmla="val 10000"/>
+            </a:avLst>
+          </a:prstGeom>
+          <a:solidFill>
+            <a:srgbClr val="FFFFFF"/>
+          </a:solidFill>
+          <a:ln w="15875">
+            <a:solidFill>
+              <a:srgbClr val="D9DEE7"/>
+            </a:solidFill>
+            <a:prstDash val="solid"/>
+          </a:ln>
+        </p:spPr>
+      </p:sp>
+      <p:sp>
+        <p:nvSpPr>
+          <p:cNvPr id="16" name="Text 14"/>
+          <p:cNvSpPr txBox="1"/>
+          <p:nvPr/>
+        </p:nvSpPr>
+        <p:spPr>
+          <a:xfrm>
+            <a:off x="914400" y="4535424"/>
+            <a:ext cx="9418320" cy="877824"/>
+          </a:xfrm>
+          <a:prstGeom prst="rect">
+            <a:avLst/>
+          </a:prstGeom>
+          <a:noFill/>
+          <a:ln/>
+        </p:spPr>
+        <p:txBody>
+          <a:bodyPr wrap="square" lIns="0" tIns="0" rIns="0" bIns="0" rtlCol="0" anchor="ctr"/>
+          <a:lstStyle/>
+          <a:p>
+            <a:pPr indent="0" marL="0">
+              <a:lnSpc>
+                <a:spcPct val="118000"/>
+              </a:lnSpc>
+              <a:buNone/>
+            </a:pPr>
+            <a:r>
+              <a:rPr lang="en-US" sz="1700" dirty="0">
+                <a:solidFill>
+                  <a:srgbClr val="101828"/>
+                </a:solidFill>
+                <a:latin typeface="IBM Plex Sans" pitchFamily="34" charset="0"/>
+                <a:ea typeface="IBM Plex Sans" pitchFamily="34" charset="-122"/>
+                <a:cs typeface="IBM Plex Sans" pitchFamily="34" charset="-120"/>
+              </a:rPr>
+              <a:t>Describe three file management tasks carried out by an operating system.</a:t>
+            </a:r>
+            <a:endParaRPr lang="en-US" sz="1700" dirty="0"/>
+          </a:p>
+        </p:txBody>
+      </p:sp>
+      <p:sp>
+        <p:nvSpPr>
+          <p:cNvPr id="17" name="Shape 15"/>
+          <p:cNvSpPr/>
+          <p:nvPr/>
+        </p:nvSpPr>
+        <p:spPr>
+          <a:xfrm>
+            <a:off x="10515600" y="4727448"/>
+            <a:ext cx="868680" cy="493776"/>
+          </a:xfrm>
+          <a:prstGeom prst="roundRect">
+            <a:avLst>
+              <a:gd name="adj" fmla="val 18519"/>
+            </a:avLst>
+          </a:prstGeom>
+          <a:solidFill>
+            <a:srgbClr val="EEF2FB"/>
+          </a:solidFill>
+          <a:ln/>
+        </p:spPr>
+      </p:sp>
+      <p:sp>
+        <p:nvSpPr>
+          <p:cNvPr id="18" name="Text 16"/>
+          <p:cNvSpPr txBox="1"/>
+          <p:nvPr/>
+        </p:nvSpPr>
+        <p:spPr>
+          <a:xfrm>
+            <a:off x="10515600" y="4727448"/>
+            <a:ext cx="868680" cy="493776"/>
+          </a:xfrm>
+          <a:prstGeom prst="rect">
+            <a:avLst/>
+          </a:prstGeom>
+          <a:noFill/>
+          <a:ln/>
+        </p:spPr>
+        <p:txBody>
+          <a:bodyPr wrap="square" lIns="0" tIns="0" rIns="0" bIns="0" rtlCol="0" anchor="ctr"/>
+          <a:lstStyle/>
+          <a:p>
+            <a:pPr algn="ctr" indent="0" marL="0">
+              <a:buNone/>
+            </a:pPr>
+            <a:r>
+              <a:rPr lang="en-US" sz="1500" b="1" dirty="0">
+                <a:solidFill>
+                  <a:srgbClr val="2D63FF"/>
+                </a:solidFill>
+                <a:latin typeface="IBM Plex Mono" pitchFamily="34" charset="0"/>
+                <a:ea typeface="IBM Plex Mono" pitchFamily="34" charset="-122"/>
+                <a:cs typeface="IBM Plex Mono" pitchFamily="34" charset="-120"/>
+              </a:rPr>
+              <a:t>[6]</a:t>
+            </a:r>
+            <a:endParaRPr lang="en-US" sz="1500" dirty="0"/>
+          </a:p>
+        </p:txBody>
+      </p:sp>
+    </p:spTree>
+  </p:cSld>
+  <p:clrMapOvr>
+    <a:masterClrMapping/>
+  </p:clrMapOvr>
+</p:sld>
+</file>
+
+<file path=ppt/slides/slide15.xml><?xml version="1.0" encoding="utf-8"?>
+<p:sld xmlns:a="http://schemas.openxmlformats.org/drawingml/2006/main" xmlns:r="http://schemas.openxmlformats.org/officeDocument/2006/relationships" xmlns:p="http://schemas.openxmlformats.org/presentationml/2006/main">
+  <p:cSld name="Slide 15">
     <p:bg>
       <p:bgPr>
         <a:solidFill>
